--- a/KazBioFert_Board_Presentation_FINAL_20260709.pptx
+++ b/KazBioFert_Board_Presentation_FINAL_20260709.pptx
@@ -26,6 +26,7 @@
     <p:sldId id="281" r:id="rId30"/>
     <p:sldId id="282" r:id="rId31"/>
     <p:sldId id="283" r:id="rId32"/>
+    <p:sldId id="284" r:id="rId33"/>
     <p:sldId id="271" r:id="rId16"/>
     <p:sldId id="272" r:id="rId17"/>
     <p:sldId id="273" r:id="rId18"/>
@@ -866,7 +867,7 @@
             </c:strRef>
           </c:tx>
           <c:spPr>
-            <a:ln w="28575">
+            <a:ln w="31750">
               <a:solidFill>
                 <a:srgbClr val="2F6690"/>
               </a:solidFill>
@@ -968,7 +969,7 @@
             </c:strRef>
           </c:tx>
           <c:spPr>
-            <a:ln w="28575">
+            <a:ln w="31750">
               <a:solidFill>
                 <a:srgbClr val="C4772F"/>
               </a:solidFill>
@@ -1308,7 +1309,7 @@
           <c:showBubbleSize val="0"/>
           <c:showLeaderLines val="1"/>
         </c:dLbls>
-        <c:gapWidth val="60"/>
+        <c:gapWidth val="55"/>
         <c:axId val="-2068027336"/>
         <c:axId val="-2113994440"/>
       </c:barChart>
@@ -1367,225 +1368,6 @@
           </c:spPr>
         </c:majorGridlines>
         <c:numFmt formatCode="0" sourceLinked="0"/>
-        <c:majorTickMark val="none"/>
-        <c:minorTickMark val="none"/>
-        <c:tickLblPos val="nextTo"/>
-        <c:spPr>
-          <a:ln>
-            <a:noFill/>
-          </a:ln>
-        </c:spPr>
-        <c:txPr>
-          <a:bodyPr/>
-          <a:lstStyle/>
-          <a:p>
-            <a:pPr>
-              <a:defRPr sz="750">
-                <a:solidFill>
-                  <a:srgbClr val="6B7A8D"/>
-                </a:solidFill>
-                <a:latin typeface="Calibri"/>
-              </a:defRPr>
-            </a:pPr>
-          </a:p>
-        </c:txPr>
-        <c:crossAx val="-2068027336"/>
-        <c:crosses val="autoZero"/>
-      </c:valAx>
-    </c:plotArea>
-    <c:dispBlanksAs val="gap"/>
-  </c:chart>
-  <c:txPr>
-    <a:bodyPr/>
-    <a:lstStyle/>
-    <a:p>
-      <a:pPr>
-        <a:defRPr sz="800">
-          <a:solidFill>
-            <a:srgbClr val="2A3746"/>
-          </a:solidFill>
-          <a:latin typeface="Calibri"/>
-        </a:defRPr>
-      </a:pPr>
-      <a:endParaRPr lang="en-US"/>
-    </a:p>
-  </c:txPr>
-  <c:externalData r:id="rId1">
-    <c:autoUpdate val="0"/>
-  </c:externalData>
-</c:chartSpace>
-</file>
-
-<file path=ppt/charts/chart5.xml><?xml version="1.0" encoding="utf-8"?>
-<c:chartSpace xmlns:c="http://schemas.openxmlformats.org/drawingml/2006/chart" xmlns:a="http://schemas.openxmlformats.org/drawingml/2006/main" xmlns:r="http://schemas.openxmlformats.org/officeDocument/2006/relationships">
-  <c:date1904 val="0"/>
-  <c:chart>
-    <c:autoTitleDeleted val="1"/>
-    <c:plotArea>
-      <c:barChart>
-        <c:barDir val="col"/>
-        <c:grouping val="clustered"/>
-        <c:ser>
-          <c:idx val="0"/>
-          <c:order val="0"/>
-          <c:tx>
-            <c:strRef>
-              <c:f>Sheet1!$B$1</c:f>
-              <c:strCache>
-                <c:ptCount val="1"/>
-                <c:pt idx="0">
-                  <c:v>$/т</c:v>
-                </c:pt>
-              </c:strCache>
-            </c:strRef>
-          </c:tx>
-          <c:dPt>
-            <c:idx val="0"/>
-            <c:spPr>
-              <a:solidFill>
-                <a:srgbClr val="5B8C6E"/>
-              </a:solidFill>
-            </c:spPr>
-          </c:dPt>
-          <c:dPt>
-            <c:idx val="1"/>
-            <c:spPr>
-              <a:solidFill>
-                <a:srgbClr val="2F6690"/>
-              </a:solidFill>
-            </c:spPr>
-          </c:dPt>
-          <c:dPt>
-            <c:idx val="2"/>
-            <c:spPr>
-              <a:solidFill>
-                <a:srgbClr val="13294B"/>
-              </a:solidFill>
-            </c:spPr>
-          </c:dPt>
-          <c:cat>
-            <c:strRef>
-              <c:f>Sheet1!$A$2:$A$4</c:f>
-              <c:strCache>
-                <c:ptCount val="3"/>
-                <c:pt idx="0">
-                  <c:v>Себест.
-ОМУ</c:v>
-                </c:pt>
-                <c:pt idx="1">
-                  <c:v>Цена
-реализ.</c:v>
-                </c:pt>
-                <c:pt idx="2">
-                  <c:v>Импорт
-комплекс.</c:v>
-                </c:pt>
-              </c:strCache>
-            </c:strRef>
-          </c:cat>
-          <c:val>
-            <c:numRef>
-              <c:f>Sheet1!$B$2:$B$4</c:f>
-              <c:numCache>
-                <c:formatCode>General</c:formatCode>
-                <c:ptCount val="3"/>
-                <c:pt idx="0">
-                  <c:v>233</c:v>
-                </c:pt>
-                <c:pt idx="1">
-                  <c:v>450</c:v>
-                </c:pt>
-                <c:pt idx="2">
-                  <c:v>630</c:v>
-                </c:pt>
-              </c:numCache>
-            </c:numRef>
-          </c:val>
-        </c:ser>
-        <c:dLbls>
-          <c:numFmt formatCode="$0" sourceLinked="0"/>
-          <c:txPr>
-            <a:bodyPr/>
-            <a:lstStyle/>
-            <a:p>
-              <a:pPr>
-                <a:defRPr sz="950" b="1">
-                  <a:solidFill>
-                    <a:srgbClr val="2A3746"/>
-                  </a:solidFill>
-                  <a:latin typeface="Calibri"/>
-                </a:defRPr>
-              </a:pPr>
-            </a:p>
-          </c:txPr>
-          <c:dLblPos val="outEnd"/>
-          <c:showLegendKey val="0"/>
-          <c:showVal val="1"/>
-          <c:showCatName val="0"/>
-          <c:showSerName val="0"/>
-          <c:showPercent val="0"/>
-          <c:showBubbleSize val="0"/>
-          <c:showLeaderLines val="1"/>
-        </c:dLbls>
-        <c:gapWidth val="70"/>
-        <c:axId val="-2068027336"/>
-        <c:axId val="-2113994440"/>
-      </c:barChart>
-      <c:catAx>
-        <c:axId val="-2068027336"/>
-        <c:scaling>
-          <c:orientation val="minMax"/>
-        </c:scaling>
-        <c:delete val="0"/>
-        <c:axPos val="b"/>
-        <c:majorTickMark val="none"/>
-        <c:minorTickMark val="none"/>
-        <c:tickLblPos val="nextTo"/>
-        <c:spPr>
-          <a:ln w="9525">
-            <a:solidFill>
-              <a:srgbClr val="DCE3EB"/>
-            </a:solidFill>
-          </a:ln>
-        </c:spPr>
-        <c:txPr>
-          <a:bodyPr/>
-          <a:lstStyle/>
-          <a:p>
-            <a:pPr>
-              <a:defRPr sz="800">
-                <a:solidFill>
-                  <a:srgbClr val="2A3746"/>
-                </a:solidFill>
-                <a:latin typeface="Calibri"/>
-              </a:defRPr>
-            </a:pPr>
-          </a:p>
-        </c:txPr>
-        <c:crossAx val="-2113994440"/>
-        <c:crosses val="autoZero"/>
-        <c:auto val="1"/>
-        <c:lblAlgn val="ctr"/>
-        <c:lblOffset val="100"/>
-        <c:noMultiLvlLbl val="0"/>
-      </c:catAx>
-      <c:valAx>
-        <c:axId val="-2113994440"/>
-        <c:scaling>
-          <c:max val="700.0"/>
-        </c:scaling>
-        <c:delete val="0"/>
-        <c:axPos val="l"/>
-        <c:majorGridlines>
-          <c:spPr>
-            <a:ln w="9525">
-              <a:solidFill>
-                <a:srgbClr val="EAEFF4"/>
-              </a:solidFill>
-            </a:ln>
-          </c:spPr>
-        </c:majorGridlines>
-        <c:numFmt formatCode="$0" sourceLinked="0"/>
         <c:majorTickMark val="none"/>
         <c:minorTickMark val="none"/>
         <c:tickLblPos val="nextTo"/>
@@ -15263,7 +15045,7 @@
                 <a:ea typeface="Calibri" pitchFamily="34" charset="-122"/>
                 <a:cs typeface="Calibri" pitchFamily="34" charset="-120"/>
               </a:rPr>
-              <a:t>19</a:t>
+              <a:t>20</a:t>
             </a:r>
             <a:endParaRPr lang="en-US" sz="900" dirty="0"/>
           </a:p>
@@ -16408,7 +16190,7 @@
                 <a:ea typeface="Calibri" pitchFamily="34" charset="-122"/>
                 <a:cs typeface="Calibri" pitchFamily="34" charset="-120"/>
               </a:rPr>
-              <a:t>20</a:t>
+              <a:t>21</a:t>
             </a:r>
             <a:endParaRPr lang="en-US" sz="900" dirty="0"/>
           </a:p>
@@ -17645,7 +17427,7 @@
                 <a:ea typeface="Calibri" pitchFamily="34" charset="-122"/>
                 <a:cs typeface="Calibri" pitchFamily="34" charset="-120"/>
               </a:rPr>
-              <a:t>21</a:t>
+              <a:t>22</a:t>
             </a:r>
             <a:endParaRPr lang="en-US" sz="900" dirty="0"/>
           </a:p>
@@ -18586,7 +18368,7 @@
                 <a:ea typeface="Calibri" pitchFamily="34" charset="-122"/>
                 <a:cs typeface="Calibri" pitchFamily="34" charset="-120"/>
               </a:rPr>
-              <a:t>22</a:t>
+              <a:t>23</a:t>
             </a:r>
             <a:endParaRPr lang="en-US" sz="900" dirty="0"/>
           </a:p>
@@ -19359,7 +19141,7 @@
                 <a:ea typeface="Calibri" pitchFamily="34" charset="-122"/>
                 <a:cs typeface="Calibri" pitchFamily="34" charset="-120"/>
               </a:rPr>
-              <a:t>23</a:t>
+              <a:t>24</a:t>
             </a:r>
             <a:endParaRPr lang="en-US" sz="900" dirty="0"/>
           </a:p>
@@ -22211,7 +21993,7 @@
                 <a:ea typeface="Calibri" pitchFamily="34" charset="-122"/>
                 <a:cs typeface="Calibri" pitchFamily="34" charset="-120"/>
               </a:rPr>
-              <a:t>24</a:t>
+              <a:t>25</a:t>
             </a:r>
             <a:endParaRPr lang="en-US" sz="900" dirty="0"/>
           </a:p>
@@ -23265,7 +23047,7 @@
                 <a:ea typeface="Calibri" pitchFamily="34" charset="-122"/>
                 <a:cs typeface="Calibri" pitchFamily="34" charset="-120"/>
               </a:rPr>
-              <a:t>25</a:t>
+              <a:t>26</a:t>
             </a:r>
             <a:endParaRPr lang="en-US" sz="900" dirty="0"/>
           </a:p>
@@ -23601,222 +23383,23 @@
       </p:cxnSp>
       <p:sp>
         <p:nvSpPr>
-          <p:cNvPr id="4" name="TextBox 3"/>
-          <p:cNvSpPr txBox="1"/>
+          <p:cNvPr id="4" name="Rectangle 3"/>
+          <p:cNvSpPr/>
           <p:nvPr/>
         </p:nvSpPr>
         <p:spPr>
           <a:xfrm>
             <a:off x="711200" y="1168400"/>
-            <a:ext cx="6350000" cy="203200"/>
-          </a:xfrm>
-          <a:prstGeom prst="rect">
-            <a:avLst/>
-          </a:prstGeom>
-          <a:noFill/>
-        </p:spPr>
-        <p:txBody>
-          <a:bodyPr wrap="square" anchor="t" lIns="0" rIns="0" tIns="0" bIns="0">
-            <a:spAutoFit/>
-          </a:bodyPr>
-          <a:lstStyle/>
-          <a:p>
-            <a:pPr algn="l">
-              <a:spcBef>
-                <a:spcPts val="0"/>
-              </a:spcBef>
-            </a:pPr>
-            <a:r>
-              <a:rPr sz="1100" b="1" spc="260">
-                <a:solidFill>
-                  <a:srgbClr val="E0A46A"/>
-                </a:solidFill>
-                <a:latin typeface="Calibri"/>
-              </a:rPr>
-              <a:t>MARKET INTELLIGENCE</a:t>
-            </a:r>
-          </a:p>
-        </p:txBody>
-      </p:sp>
-      <p:sp>
-        <p:nvSpPr>
-          <p:cNvPr id="5" name="TextBox 4"/>
-          <p:cNvSpPr txBox="1"/>
-          <p:nvPr/>
-        </p:nvSpPr>
-        <p:spPr>
-          <a:xfrm>
-            <a:off x="685800" y="1473200"/>
-            <a:ext cx="6604000" cy="584200"/>
-          </a:xfrm>
-          <a:prstGeom prst="rect">
-            <a:avLst/>
-          </a:prstGeom>
-          <a:noFill/>
-        </p:spPr>
-        <p:txBody>
-          <a:bodyPr wrap="square" anchor="t" lIns="0" rIns="0" tIns="0" bIns="0">
-            <a:spAutoFit/>
-          </a:bodyPr>
-          <a:lstStyle/>
-          <a:p>
-            <a:pPr algn="l">
-              <a:spcBef>
-                <a:spcPts val="0"/>
-              </a:spcBef>
-            </a:pPr>
-            <a:r>
-              <a:rPr sz="4000" b="1">
-                <a:solidFill>
-                  <a:srgbClr val="FFFFFF"/>
-                </a:solidFill>
-                <a:latin typeface="Arial"/>
-              </a:rPr>
-              <a:t>АНАЛИЗ РЫНКА</a:t>
-            </a:r>
-          </a:p>
-        </p:txBody>
-      </p:sp>
-      <p:sp>
-        <p:nvSpPr>
-          <p:cNvPr id="6" name="TextBox 5"/>
-          <p:cNvSpPr txBox="1"/>
-          <p:nvPr/>
-        </p:nvSpPr>
-        <p:spPr>
-          <a:xfrm>
-            <a:off x="685800" y="2032000"/>
-            <a:ext cx="6604000" cy="584200"/>
-          </a:xfrm>
-          <a:prstGeom prst="rect">
-            <a:avLst/>
-          </a:prstGeom>
-          <a:noFill/>
-        </p:spPr>
-        <p:txBody>
-          <a:bodyPr wrap="square" anchor="t" lIns="0" rIns="0" tIns="0" bIns="0">
-            <a:spAutoFit/>
-          </a:bodyPr>
-          <a:lstStyle/>
-          <a:p>
-            <a:pPr algn="l">
-              <a:spcBef>
-                <a:spcPts val="0"/>
-              </a:spcBef>
-            </a:pPr>
-            <a:r>
-              <a:rPr sz="4000" b="1">
-                <a:solidFill>
-                  <a:srgbClr val="FFFFFF"/>
-                </a:solidFill>
-                <a:latin typeface="Arial"/>
-              </a:rPr>
-              <a:t>УДОБРЕНИЙ</a:t>
-            </a:r>
-          </a:p>
-        </p:txBody>
-      </p:sp>
-      <p:cxnSp>
-        <p:nvCxnSpPr>
-          <p:cNvPr id="7" name="Connector 6"/>
-          <p:cNvCxnSpPr/>
-          <p:nvPr/>
-        </p:nvCxnSpPr>
-        <p:spPr>
-          <a:xfrm>
-            <a:off x="736600" y="2717800"/>
-            <a:ext cx="1676400" cy="0"/>
-          </a:xfrm>
-          <a:prstGeom prst="line">
-            <a:avLst/>
-          </a:prstGeom>
-          <a:ln w="31750">
-            <a:solidFill>
-              <a:srgbClr val="E0A46A"/>
-            </a:solidFill>
-          </a:ln>
-          <a:effectLst/>
-        </p:spPr>
-        <p:style>
-          <a:lnRef idx="2">
-            <a:schemeClr val="accent1"/>
-          </a:lnRef>
-          <a:fillRef idx="0">
-            <a:schemeClr val="accent1"/>
-          </a:fillRef>
-          <a:effectRef idx="1">
-            <a:schemeClr val="accent1"/>
-          </a:effectRef>
-          <a:fontRef idx="minor">
-            <a:schemeClr val="tx1"/>
-          </a:fontRef>
-        </p:style>
-      </p:cxnSp>
-      <p:sp>
-        <p:nvSpPr>
-          <p:cNvPr id="8" name="TextBox 7"/>
-          <p:cNvSpPr txBox="1"/>
-          <p:nvPr/>
-        </p:nvSpPr>
-        <p:spPr>
-          <a:xfrm>
-            <a:off x="711200" y="2895600"/>
-            <a:ext cx="5969000" cy="431800"/>
-          </a:xfrm>
-          <a:prstGeom prst="rect">
-            <a:avLst/>
-          </a:prstGeom>
-          <a:noFill/>
-        </p:spPr>
-        <p:txBody>
-          <a:bodyPr wrap="square" anchor="t" lIns="0" rIns="0" tIns="0" bIns="0">
-            <a:spAutoFit/>
-          </a:bodyPr>
-          <a:lstStyle/>
-          <a:p>
-            <a:pPr algn="l">
-              <a:lnSpc>
-                <a:spcPct val="115000"/>
-              </a:lnSpc>
-              <a:spcBef>
-                <a:spcPts val="0"/>
-              </a:spcBef>
-            </a:pPr>
-            <a:r>
-              <a:rPr sz="1250" b="0">
-                <a:solidFill>
-                  <a:srgbClr val="AEC8DE"/>
-                </a:solidFill>
-                <a:latin typeface="Calibri"/>
-              </a:rPr>
-              <a:t>Мировой рынок · Рынок Казахстана · Ценовое позиционирование и себестоимость ОМУ</a:t>
-            </a:r>
-          </a:p>
-        </p:txBody>
-      </p:sp>
-      <p:sp>
-        <p:nvSpPr>
-          <p:cNvPr id="9" name="Rounded Rectangle 8"/>
-          <p:cNvSpPr/>
-          <p:nvPr/>
-        </p:nvSpPr>
-        <p:spPr>
-          <a:xfrm>
-            <a:off x="711200" y="3403600"/>
-            <a:ext cx="2946400" cy="279400"/>
-          </a:xfrm>
-          <a:prstGeom prst="roundRect">
-            <a:avLst>
-              <a:gd name="adj" fmla="val 50000"/>
-            </a:avLst>
+            <a:ext cx="381000" cy="38100"/>
+          </a:xfrm>
+          <a:prstGeom prst="rect">
+            <a:avLst/>
           </a:prstGeom>
           <a:solidFill>
-            <a:srgbClr val="0C1D38"/>
+            <a:srgbClr val="E0A46A"/>
           </a:solidFill>
-          <a:ln w="12700">
-            <a:solidFill>
-              <a:srgbClr val="355274"/>
-            </a:solidFill>
+          <a:ln>
+            <a:noFill/>
           </a:ln>
           <a:effectLst/>
         </p:spPr>
@@ -23844,57 +23427,177 @@
       </p:sp>
       <p:sp>
         <p:nvSpPr>
-          <p:cNvPr id="10" name="TextBox 9"/>
+          <p:cNvPr id="5" name="TextBox 4"/>
           <p:cNvSpPr txBox="1"/>
           <p:nvPr/>
         </p:nvSpPr>
         <p:spPr>
           <a:xfrm>
-            <a:off x="711200" y="3416300"/>
-            <a:ext cx="2946400" cy="254000"/>
-          </a:xfrm>
-          <a:prstGeom prst="rect">
-            <a:avLst/>
-          </a:prstGeom>
-          <a:noFill/>
-        </p:spPr>
-        <p:txBody>
-          <a:bodyPr wrap="square" anchor="ctr" lIns="0" rIns="0" tIns="0" bIns="0">
+            <a:off x="711200" y="1270000"/>
+            <a:ext cx="6350000" cy="203200"/>
+          </a:xfrm>
+          <a:prstGeom prst="rect">
+            <a:avLst/>
+          </a:prstGeom>
+          <a:noFill/>
+        </p:spPr>
+        <p:txBody>
+          <a:bodyPr wrap="square" anchor="t" lIns="0" rIns="0" tIns="0" bIns="0">
             <a:spAutoFit/>
           </a:bodyPr>
           <a:lstStyle/>
           <a:p>
-            <a:pPr algn="ctr">
+            <a:pPr algn="l">
               <a:spcBef>
                 <a:spcPts val="0"/>
               </a:spcBef>
             </a:pPr>
             <a:r>
-              <a:rPr sz="900" b="1">
+              <a:rPr sz="1100" b="1" spc="240">
                 <a:solidFill>
                   <a:srgbClr val="E0A46A"/>
                 </a:solidFill>
                 <a:latin typeface="Calibri"/>
               </a:rPr>
-              <a:t>Данные актуализированы на 30.06.2026</a:t>
-            </a:r>
-          </a:p>
-        </p:txBody>
-      </p:sp>
-      <p:sp>
-        <p:nvSpPr>
-          <p:cNvPr id="11" name="Rounded Rectangle 10"/>
-          <p:cNvSpPr/>
-          <p:nvPr/>
-        </p:nvSpPr>
-        <p:spPr>
-          <a:xfrm>
-            <a:off x="711200" y="3886200"/>
-            <a:ext cx="2489200" cy="685800"/>
+              <a:t>MARKET INTELLIGENCE  ·  РАЗДЕЛ</a:t>
+            </a:r>
+          </a:p>
+        </p:txBody>
+      </p:sp>
+      <p:sp>
+        <p:nvSpPr>
+          <p:cNvPr id="6" name="TextBox 5"/>
+          <p:cNvSpPr txBox="1"/>
+          <p:nvPr/>
+        </p:nvSpPr>
+        <p:spPr>
+          <a:xfrm>
+            <a:off x="685800" y="1600200"/>
+            <a:ext cx="6604000" cy="584200"/>
+          </a:xfrm>
+          <a:prstGeom prst="rect">
+            <a:avLst/>
+          </a:prstGeom>
+          <a:noFill/>
+        </p:spPr>
+        <p:txBody>
+          <a:bodyPr wrap="square" anchor="t" lIns="0" rIns="0" tIns="0" bIns="0">
+            <a:spAutoFit/>
+          </a:bodyPr>
+          <a:lstStyle/>
+          <a:p>
+            <a:pPr algn="l">
+              <a:spcBef>
+                <a:spcPts val="0"/>
+              </a:spcBef>
+            </a:pPr>
+            <a:r>
+              <a:rPr sz="4000" b="1">
+                <a:solidFill>
+                  <a:srgbClr val="FFFFFF"/>
+                </a:solidFill>
+                <a:latin typeface="Arial"/>
+              </a:rPr>
+              <a:t>АНАЛИЗ РЫНКА</a:t>
+            </a:r>
+          </a:p>
+        </p:txBody>
+      </p:sp>
+      <p:sp>
+        <p:nvSpPr>
+          <p:cNvPr id="7" name="TextBox 6"/>
+          <p:cNvSpPr txBox="1"/>
+          <p:nvPr/>
+        </p:nvSpPr>
+        <p:spPr>
+          <a:xfrm>
+            <a:off x="685800" y="2159000"/>
+            <a:ext cx="6604000" cy="584200"/>
+          </a:xfrm>
+          <a:prstGeom prst="rect">
+            <a:avLst/>
+          </a:prstGeom>
+          <a:noFill/>
+        </p:spPr>
+        <p:txBody>
+          <a:bodyPr wrap="square" anchor="t" lIns="0" rIns="0" tIns="0" bIns="0">
+            <a:spAutoFit/>
+          </a:bodyPr>
+          <a:lstStyle/>
+          <a:p>
+            <a:pPr algn="l">
+              <a:spcBef>
+                <a:spcPts val="0"/>
+              </a:spcBef>
+            </a:pPr>
+            <a:r>
+              <a:rPr sz="4000" b="1">
+                <a:solidFill>
+                  <a:srgbClr val="FFFFFF"/>
+                </a:solidFill>
+                <a:latin typeface="Arial"/>
+              </a:rPr>
+              <a:t>УДОБРЕНИЙ</a:t>
+            </a:r>
+          </a:p>
+        </p:txBody>
+      </p:sp>
+      <p:sp>
+        <p:nvSpPr>
+          <p:cNvPr id="8" name="TextBox 7"/>
+          <p:cNvSpPr txBox="1"/>
+          <p:nvPr/>
+        </p:nvSpPr>
+        <p:spPr>
+          <a:xfrm>
+            <a:off x="711200" y="2870200"/>
+            <a:ext cx="5080000" cy="254000"/>
+          </a:xfrm>
+          <a:prstGeom prst="rect">
+            <a:avLst/>
+          </a:prstGeom>
+          <a:noFill/>
+        </p:spPr>
+        <p:txBody>
+          <a:bodyPr wrap="square" anchor="t" lIns="0" rIns="0" tIns="0" bIns="0">
+            <a:spAutoFit/>
+          </a:bodyPr>
+          <a:lstStyle/>
+          <a:p>
+            <a:pPr algn="l">
+              <a:lnSpc>
+                <a:spcPct val="112000"/>
+              </a:lnSpc>
+              <a:spcBef>
+                <a:spcPts val="0"/>
+              </a:spcBef>
+            </a:pPr>
+            <a:r>
+              <a:rPr sz="1150" b="0">
+                <a:solidFill>
+                  <a:srgbClr val="AEC8DE"/>
+                </a:solidFill>
+                <a:latin typeface="Calibri"/>
+              </a:rPr>
+              <a:t>Мировой рынок · Казахстан · Ценовое позиционирование ОМУ · Инвестиционный тезис</a:t>
+            </a:r>
+          </a:p>
+        </p:txBody>
+      </p:sp>
+      <p:sp>
+        <p:nvSpPr>
+          <p:cNvPr id="9" name="Rounded Rectangle 8"/>
+          <p:cNvSpPr/>
+          <p:nvPr/>
+        </p:nvSpPr>
+        <p:spPr>
+          <a:xfrm>
+            <a:off x="711200" y="3327400"/>
+            <a:ext cx="2997200" cy="279400"/>
           </a:xfrm>
           <a:prstGeom prst="roundRect">
             <a:avLst>
-              <a:gd name="adj" fmla="val 10000"/>
+              <a:gd name="adj" fmla="val 50000"/>
             </a:avLst>
           </a:prstGeom>
           <a:solidFill>
@@ -23902,7 +23605,7 @@
           </a:solidFill>
           <a:ln w="12700">
             <a:solidFill>
-              <a:srgbClr val="243A59"/>
+              <a:srgbClr val="355274"/>
             </a:solidFill>
           </a:ln>
           <a:effectLst/>
@@ -23931,23 +23634,66 @@
       </p:sp>
       <p:sp>
         <p:nvSpPr>
-          <p:cNvPr id="12" name="Rectangle 11"/>
-          <p:cNvSpPr/>
-          <p:nvPr/>
-        </p:nvSpPr>
-        <p:spPr>
-          <a:xfrm>
-            <a:off x="736600" y="3949700"/>
-            <a:ext cx="38100" cy="558800"/>
-          </a:xfrm>
-          <a:prstGeom prst="rect">
-            <a:avLst/>
+          <p:cNvPr id="10" name="TextBox 9"/>
+          <p:cNvSpPr txBox="1"/>
+          <p:nvPr/>
+        </p:nvSpPr>
+        <p:spPr>
+          <a:xfrm>
+            <a:off x="711200" y="3340100"/>
+            <a:ext cx="2997200" cy="254000"/>
+          </a:xfrm>
+          <a:prstGeom prst="rect">
+            <a:avLst/>
+          </a:prstGeom>
+          <a:noFill/>
+        </p:spPr>
+        <p:txBody>
+          <a:bodyPr wrap="square" anchor="ctr" lIns="0" rIns="0" tIns="0" bIns="0">
+            <a:spAutoFit/>
+          </a:bodyPr>
+          <a:lstStyle/>
+          <a:p>
+            <a:pPr algn="ctr">
+              <a:spcBef>
+                <a:spcPts val="0"/>
+              </a:spcBef>
+            </a:pPr>
+            <a:r>
+              <a:rPr sz="900" b="1">
+                <a:solidFill>
+                  <a:srgbClr val="E0A46A"/>
+                </a:solidFill>
+                <a:latin typeface="Calibri"/>
+              </a:rPr>
+              <a:t>Данные актуализированы на 30.06.2026</a:t>
+            </a:r>
+          </a:p>
+        </p:txBody>
+      </p:sp>
+      <p:sp>
+        <p:nvSpPr>
+          <p:cNvPr id="11" name="Rounded Rectangle 10"/>
+          <p:cNvSpPr/>
+          <p:nvPr/>
+        </p:nvSpPr>
+        <p:spPr>
+          <a:xfrm>
+            <a:off x="711200" y="3835400"/>
+            <a:ext cx="2489200" cy="711200"/>
+          </a:xfrm>
+          <a:prstGeom prst="roundRect">
+            <a:avLst>
+              <a:gd name="adj" fmla="val 10000"/>
+            </a:avLst>
           </a:prstGeom>
           <a:solidFill>
-            <a:srgbClr val="E0A46A"/>
+            <a:srgbClr val="0C1D38"/>
           </a:solidFill>
-          <a:ln>
-            <a:noFill/>
+          <a:ln w="12700">
+            <a:solidFill>
+              <a:srgbClr val="243A59"/>
+            </a:solidFill>
           </a:ln>
           <a:effectLst/>
         </p:spPr>
@@ -23975,117 +23721,23 @@
       </p:sp>
       <p:sp>
         <p:nvSpPr>
-          <p:cNvPr id="13" name="TextBox 12"/>
-          <p:cNvSpPr txBox="1"/>
-          <p:nvPr/>
-        </p:nvSpPr>
-        <p:spPr>
-          <a:xfrm>
-            <a:off x="889000" y="3962400"/>
-            <a:ext cx="2209800" cy="304800"/>
-          </a:xfrm>
-          <a:prstGeom prst="rect">
-            <a:avLst/>
-          </a:prstGeom>
-          <a:noFill/>
-        </p:spPr>
-        <p:txBody>
-          <a:bodyPr wrap="square" anchor="b" lIns="0" rIns="0" tIns="0" bIns="0">
-            <a:spAutoFit/>
-          </a:bodyPr>
-          <a:lstStyle/>
-          <a:p>
-            <a:pPr algn="l">
-              <a:spcBef>
-                <a:spcPts val="0"/>
-              </a:spcBef>
-            </a:pPr>
-            <a:r>
-              <a:rPr sz="2500" b="1">
-                <a:solidFill>
-                  <a:srgbClr val="E0A46A"/>
-                </a:solidFill>
-                <a:latin typeface="Arial"/>
-              </a:rPr>
-              <a:t>208</a:t>
-            </a:r>
-            <a:r>
-              <a:rPr sz="1050" b="1">
-                <a:solidFill>
-                  <a:srgbClr val="AEC8DE"/>
-                </a:solidFill>
-                <a:latin typeface="Calibri"/>
-              </a:rPr>
-              <a:t> млн т</a:t>
-            </a:r>
-          </a:p>
-        </p:txBody>
-      </p:sp>
-      <p:sp>
-        <p:nvSpPr>
-          <p:cNvPr id="14" name="TextBox 13"/>
-          <p:cNvSpPr txBox="1"/>
-          <p:nvPr/>
-        </p:nvSpPr>
-        <p:spPr>
-          <a:xfrm>
-            <a:off x="889000" y="4267200"/>
-            <a:ext cx="2184400" cy="279400"/>
-          </a:xfrm>
-          <a:prstGeom prst="rect">
-            <a:avLst/>
-          </a:prstGeom>
-          <a:noFill/>
-        </p:spPr>
-        <p:txBody>
-          <a:bodyPr wrap="square" anchor="t" lIns="0" rIns="0" tIns="0" bIns="0">
-            <a:spAutoFit/>
-          </a:bodyPr>
-          <a:lstStyle/>
-          <a:p>
-            <a:pPr algn="l">
-              <a:lnSpc>
-                <a:spcPct val="100000"/>
-              </a:lnSpc>
-              <a:spcBef>
-                <a:spcPts val="0"/>
-              </a:spcBef>
-            </a:pPr>
-            <a:r>
-              <a:rPr sz="860" b="0">
-                <a:solidFill>
-                  <a:srgbClr val="AEC8DE"/>
-                </a:solidFill>
-                <a:latin typeface="Calibri"/>
-              </a:rPr>
-              <a:t>мировой спрос на NPK (пит. в-ва), 2025</a:t>
-            </a:r>
-          </a:p>
-        </p:txBody>
-      </p:sp>
-      <p:sp>
-        <p:nvSpPr>
-          <p:cNvPr id="15" name="Rounded Rectangle 14"/>
-          <p:cNvSpPr/>
-          <p:nvPr/>
-        </p:nvSpPr>
-        <p:spPr>
-          <a:xfrm>
-            <a:off x="3327400" y="3886200"/>
-            <a:ext cx="2489200" cy="685800"/>
-          </a:xfrm>
-          <a:prstGeom prst="roundRect">
-            <a:avLst>
-              <a:gd name="adj" fmla="val 10000"/>
-            </a:avLst>
+          <p:cNvPr id="12" name="Rectangle 11"/>
+          <p:cNvSpPr/>
+          <p:nvPr/>
+        </p:nvSpPr>
+        <p:spPr>
+          <a:xfrm>
+            <a:off x="736600" y="3898900"/>
+            <a:ext cx="38100" cy="584200"/>
+          </a:xfrm>
+          <a:prstGeom prst="rect">
+            <a:avLst/>
           </a:prstGeom>
           <a:solidFill>
-            <a:srgbClr val="0C1D38"/>
+            <a:srgbClr val="E0A46A"/>
           </a:solidFill>
-          <a:ln w="12700">
-            <a:solidFill>
-              <a:srgbClr val="243A59"/>
-            </a:solidFill>
+          <a:ln>
+            <a:noFill/>
           </a:ln>
           <a:effectLst/>
         </p:spPr>
@@ -24113,23 +23765,117 @@
       </p:sp>
       <p:sp>
         <p:nvSpPr>
-          <p:cNvPr id="16" name="Rectangle 15"/>
-          <p:cNvSpPr/>
-          <p:nvPr/>
-        </p:nvSpPr>
-        <p:spPr>
-          <a:xfrm>
-            <a:off x="3352800" y="3949700"/>
-            <a:ext cx="38100" cy="558800"/>
-          </a:xfrm>
-          <a:prstGeom prst="rect">
-            <a:avLst/>
+          <p:cNvPr id="13" name="TextBox 12"/>
+          <p:cNvSpPr txBox="1"/>
+          <p:nvPr/>
+        </p:nvSpPr>
+        <p:spPr>
+          <a:xfrm>
+            <a:off x="889000" y="3911600"/>
+            <a:ext cx="2209800" cy="304800"/>
+          </a:xfrm>
+          <a:prstGeom prst="rect">
+            <a:avLst/>
+          </a:prstGeom>
+          <a:noFill/>
+        </p:spPr>
+        <p:txBody>
+          <a:bodyPr wrap="square" anchor="b" lIns="0" rIns="0" tIns="0" bIns="0">
+            <a:spAutoFit/>
+          </a:bodyPr>
+          <a:lstStyle/>
+          <a:p>
+            <a:pPr algn="l">
+              <a:spcBef>
+                <a:spcPts val="0"/>
+              </a:spcBef>
+            </a:pPr>
+            <a:r>
+              <a:rPr sz="2400" b="1">
+                <a:solidFill>
+                  <a:srgbClr val="E0A46A"/>
+                </a:solidFill>
+                <a:latin typeface="Arial"/>
+              </a:rPr>
+              <a:t>208</a:t>
+            </a:r>
+            <a:r>
+              <a:rPr sz="1050" b="1">
+                <a:solidFill>
+                  <a:srgbClr val="AEC8DE"/>
+                </a:solidFill>
+                <a:latin typeface="Calibri"/>
+              </a:rPr>
+              <a:t> млн т</a:t>
+            </a:r>
+          </a:p>
+        </p:txBody>
+      </p:sp>
+      <p:sp>
+        <p:nvSpPr>
+          <p:cNvPr id="14" name="TextBox 13"/>
+          <p:cNvSpPr txBox="1"/>
+          <p:nvPr/>
+        </p:nvSpPr>
+        <p:spPr>
+          <a:xfrm>
+            <a:off x="889000" y="4216400"/>
+            <a:ext cx="2184400" cy="304800"/>
+          </a:xfrm>
+          <a:prstGeom prst="rect">
+            <a:avLst/>
+          </a:prstGeom>
+          <a:noFill/>
+        </p:spPr>
+        <p:txBody>
+          <a:bodyPr wrap="square" anchor="t" lIns="0" rIns="0" tIns="0" bIns="0">
+            <a:spAutoFit/>
+          </a:bodyPr>
+          <a:lstStyle/>
+          <a:p>
+            <a:pPr algn="l">
+              <a:lnSpc>
+                <a:spcPct val="100000"/>
+              </a:lnSpc>
+              <a:spcBef>
+                <a:spcPts val="0"/>
+              </a:spcBef>
+            </a:pPr>
+            <a:r>
+              <a:rPr sz="860" b="0">
+                <a:solidFill>
+                  <a:srgbClr val="AEC8DE"/>
+                </a:solidFill>
+                <a:latin typeface="Calibri"/>
+              </a:rPr>
+              <a:t>мировой спрос на NPK (пит. в-ва), 2025</a:t>
+            </a:r>
+          </a:p>
+        </p:txBody>
+      </p:sp>
+      <p:sp>
+        <p:nvSpPr>
+          <p:cNvPr id="15" name="Rounded Rectangle 14"/>
+          <p:cNvSpPr/>
+          <p:nvPr/>
+        </p:nvSpPr>
+        <p:spPr>
+          <a:xfrm>
+            <a:off x="3327400" y="3835400"/>
+            <a:ext cx="2489200" cy="711200"/>
+          </a:xfrm>
+          <a:prstGeom prst="roundRect">
+            <a:avLst>
+              <a:gd name="adj" fmla="val 10000"/>
+            </a:avLst>
           </a:prstGeom>
           <a:solidFill>
-            <a:srgbClr val="AEC8DE"/>
+            <a:srgbClr val="0C1D38"/>
           </a:solidFill>
-          <a:ln>
-            <a:noFill/>
+          <a:ln w="12700">
+            <a:solidFill>
+              <a:srgbClr val="243A59"/>
+            </a:solidFill>
           </a:ln>
           <a:effectLst/>
         </p:spPr>
@@ -24157,117 +23903,23 @@
       </p:sp>
       <p:sp>
         <p:nvSpPr>
-          <p:cNvPr id="17" name="TextBox 16"/>
-          <p:cNvSpPr txBox="1"/>
-          <p:nvPr/>
-        </p:nvSpPr>
-        <p:spPr>
-          <a:xfrm>
-            <a:off x="3505200" y="3962400"/>
-            <a:ext cx="2209800" cy="304800"/>
-          </a:xfrm>
-          <a:prstGeom prst="rect">
-            <a:avLst/>
-          </a:prstGeom>
-          <a:noFill/>
-        </p:spPr>
-        <p:txBody>
-          <a:bodyPr wrap="square" anchor="b" lIns="0" rIns="0" tIns="0" bIns="0">
-            <a:spAutoFit/>
-          </a:bodyPr>
-          <a:lstStyle/>
-          <a:p>
-            <a:pPr algn="l">
-              <a:spcBef>
-                <a:spcPts val="0"/>
-              </a:spcBef>
-            </a:pPr>
-            <a:r>
-              <a:rPr sz="2500" b="1">
-                <a:solidFill>
-                  <a:srgbClr val="AEC8DE"/>
-                </a:solidFill>
-                <a:latin typeface="Arial"/>
-              </a:rPr>
-              <a:t>1,3</a:t>
-            </a:r>
-            <a:r>
-              <a:rPr sz="1050" b="1">
-                <a:solidFill>
-                  <a:srgbClr val="AEC8DE"/>
-                </a:solidFill>
-                <a:latin typeface="Calibri"/>
-              </a:rPr>
-              <a:t> млн т</a:t>
-            </a:r>
-          </a:p>
-        </p:txBody>
-      </p:sp>
-      <p:sp>
-        <p:nvSpPr>
-          <p:cNvPr id="18" name="TextBox 17"/>
-          <p:cNvSpPr txBox="1"/>
-          <p:nvPr/>
-        </p:nvSpPr>
-        <p:spPr>
-          <a:xfrm>
-            <a:off x="3505200" y="4267200"/>
-            <a:ext cx="2184400" cy="279400"/>
-          </a:xfrm>
-          <a:prstGeom prst="rect">
-            <a:avLst/>
-          </a:prstGeom>
-          <a:noFill/>
-        </p:spPr>
-        <p:txBody>
-          <a:bodyPr wrap="square" anchor="t" lIns="0" rIns="0" tIns="0" bIns="0">
-            <a:spAutoFit/>
-          </a:bodyPr>
-          <a:lstStyle/>
-          <a:p>
-            <a:pPr algn="l">
-              <a:lnSpc>
-                <a:spcPct val="100000"/>
-              </a:lnSpc>
-              <a:spcBef>
-                <a:spcPts val="0"/>
-              </a:spcBef>
-            </a:pPr>
-            <a:r>
-              <a:rPr sz="860" b="0">
-                <a:solidFill>
-                  <a:srgbClr val="AEC8DE"/>
-                </a:solidFill>
-                <a:latin typeface="Calibri"/>
-              </a:rPr>
-              <a:t>ёмкость рынка удобрений РК, 2025 (+19% г/г)</a:t>
-            </a:r>
-          </a:p>
-        </p:txBody>
-      </p:sp>
-      <p:sp>
-        <p:nvSpPr>
-          <p:cNvPr id="19" name="Rounded Rectangle 18"/>
-          <p:cNvSpPr/>
-          <p:nvPr/>
-        </p:nvSpPr>
-        <p:spPr>
-          <a:xfrm>
-            <a:off x="5943600" y="3886200"/>
-            <a:ext cx="2692400" cy="685800"/>
-          </a:xfrm>
-          <a:prstGeom prst="roundRect">
-            <a:avLst>
-              <a:gd name="adj" fmla="val 10000"/>
-            </a:avLst>
+          <p:cNvPr id="16" name="Rectangle 15"/>
+          <p:cNvSpPr/>
+          <p:nvPr/>
+        </p:nvSpPr>
+        <p:spPr>
+          <a:xfrm>
+            <a:off x="3352800" y="3898900"/>
+            <a:ext cx="38100" cy="584200"/>
+          </a:xfrm>
+          <a:prstGeom prst="rect">
+            <a:avLst/>
           </a:prstGeom>
           <a:solidFill>
-            <a:srgbClr val="0C1D38"/>
+            <a:srgbClr val="AEC8DE"/>
           </a:solidFill>
-          <a:ln w="12700">
-            <a:solidFill>
-              <a:srgbClr val="243A59"/>
-            </a:solidFill>
+          <a:ln>
+            <a:noFill/>
           </a:ln>
           <a:effectLst/>
         </p:spPr>
@@ -24295,23 +23947,117 @@
       </p:sp>
       <p:sp>
         <p:nvSpPr>
-          <p:cNvPr id="20" name="Rectangle 19"/>
-          <p:cNvSpPr/>
-          <p:nvPr/>
-        </p:nvSpPr>
-        <p:spPr>
-          <a:xfrm>
-            <a:off x="5969000" y="3949700"/>
-            <a:ext cx="38100" cy="558800"/>
-          </a:xfrm>
-          <a:prstGeom prst="rect">
-            <a:avLst/>
+          <p:cNvPr id="17" name="TextBox 16"/>
+          <p:cNvSpPr txBox="1"/>
+          <p:nvPr/>
+        </p:nvSpPr>
+        <p:spPr>
+          <a:xfrm>
+            <a:off x="3505200" y="3911600"/>
+            <a:ext cx="2209800" cy="304800"/>
+          </a:xfrm>
+          <a:prstGeom prst="rect">
+            <a:avLst/>
+          </a:prstGeom>
+          <a:noFill/>
+        </p:spPr>
+        <p:txBody>
+          <a:bodyPr wrap="square" anchor="b" lIns="0" rIns="0" tIns="0" bIns="0">
+            <a:spAutoFit/>
+          </a:bodyPr>
+          <a:lstStyle/>
+          <a:p>
+            <a:pPr algn="l">
+              <a:spcBef>
+                <a:spcPts val="0"/>
+              </a:spcBef>
+            </a:pPr>
+            <a:r>
+              <a:rPr sz="2400" b="1">
+                <a:solidFill>
+                  <a:srgbClr val="AEC8DE"/>
+                </a:solidFill>
+                <a:latin typeface="Arial"/>
+              </a:rPr>
+              <a:t>1,3</a:t>
+            </a:r>
+            <a:r>
+              <a:rPr sz="1050" b="1">
+                <a:solidFill>
+                  <a:srgbClr val="AEC8DE"/>
+                </a:solidFill>
+                <a:latin typeface="Calibri"/>
+              </a:rPr>
+              <a:t> млн т</a:t>
+            </a:r>
+          </a:p>
+        </p:txBody>
+      </p:sp>
+      <p:sp>
+        <p:nvSpPr>
+          <p:cNvPr id="18" name="TextBox 17"/>
+          <p:cNvSpPr txBox="1"/>
+          <p:nvPr/>
+        </p:nvSpPr>
+        <p:spPr>
+          <a:xfrm>
+            <a:off x="3505200" y="4216400"/>
+            <a:ext cx="2184400" cy="304800"/>
+          </a:xfrm>
+          <a:prstGeom prst="rect">
+            <a:avLst/>
+          </a:prstGeom>
+          <a:noFill/>
+        </p:spPr>
+        <p:txBody>
+          <a:bodyPr wrap="square" anchor="t" lIns="0" rIns="0" tIns="0" bIns="0">
+            <a:spAutoFit/>
+          </a:bodyPr>
+          <a:lstStyle/>
+          <a:p>
+            <a:pPr algn="l">
+              <a:lnSpc>
+                <a:spcPct val="100000"/>
+              </a:lnSpc>
+              <a:spcBef>
+                <a:spcPts val="0"/>
+              </a:spcBef>
+            </a:pPr>
+            <a:r>
+              <a:rPr sz="860" b="0">
+                <a:solidFill>
+                  <a:srgbClr val="AEC8DE"/>
+                </a:solidFill>
+                <a:latin typeface="Calibri"/>
+              </a:rPr>
+              <a:t>ёмкость рынка удобрений РК, 2025 (+19% г/г)</a:t>
+            </a:r>
+          </a:p>
+        </p:txBody>
+      </p:sp>
+      <p:sp>
+        <p:nvSpPr>
+          <p:cNvPr id="19" name="Rounded Rectangle 18"/>
+          <p:cNvSpPr/>
+          <p:nvPr/>
+        </p:nvSpPr>
+        <p:spPr>
+          <a:xfrm>
+            <a:off x="5943600" y="3835400"/>
+            <a:ext cx="2692400" cy="711200"/>
+          </a:xfrm>
+          <a:prstGeom prst="roundRect">
+            <a:avLst>
+              <a:gd name="adj" fmla="val 10000"/>
+            </a:avLst>
           </a:prstGeom>
           <a:solidFill>
-            <a:srgbClr val="FFFFFF"/>
+            <a:srgbClr val="0C1D38"/>
           </a:solidFill>
-          <a:ln>
-            <a:noFill/>
+          <a:ln w="12700">
+            <a:solidFill>
+              <a:srgbClr val="243A59"/>
+            </a:solidFill>
           </a:ln>
           <a:effectLst/>
         </p:spPr>
@@ -24339,13 +24085,57 @@
       </p:sp>
       <p:sp>
         <p:nvSpPr>
+          <p:cNvPr id="20" name="Rectangle 19"/>
+          <p:cNvSpPr/>
+          <p:nvPr/>
+        </p:nvSpPr>
+        <p:spPr>
+          <a:xfrm>
+            <a:off x="5969000" y="3898900"/>
+            <a:ext cx="38100" cy="584200"/>
+          </a:xfrm>
+          <a:prstGeom prst="rect">
+            <a:avLst/>
+          </a:prstGeom>
+          <a:solidFill>
+            <a:srgbClr val="FFFFFF"/>
+          </a:solidFill>
+          <a:ln>
+            <a:noFill/>
+          </a:ln>
+          <a:effectLst/>
+        </p:spPr>
+        <p:style>
+          <a:lnRef idx="1">
+            <a:schemeClr val="accent1"/>
+          </a:lnRef>
+          <a:fillRef idx="3">
+            <a:schemeClr val="accent1"/>
+          </a:fillRef>
+          <a:effectRef idx="2">
+            <a:schemeClr val="accent1"/>
+          </a:effectRef>
+          <a:fontRef idx="minor">
+            <a:schemeClr val="lt1"/>
+          </a:fontRef>
+        </p:style>
+        <p:txBody>
+          <a:bodyPr rtlCol="0" anchor="ctr"/>
+          <a:lstStyle/>
+          <a:p>
+            <a:pPr algn="ctr"/>
+          </a:p>
+        </p:txBody>
+      </p:sp>
+      <p:sp>
+        <p:nvSpPr>
           <p:cNvPr id="21" name="TextBox 20"/>
           <p:cNvSpPr txBox="1"/>
           <p:nvPr/>
         </p:nvSpPr>
         <p:spPr>
           <a:xfrm>
-            <a:off x="6121400" y="3962400"/>
+            <a:off x="6121400" y="3911600"/>
             <a:ext cx="2413000" cy="304800"/>
           </a:xfrm>
           <a:prstGeom prst="rect">
@@ -24365,13 +24155,13 @@
               </a:spcBef>
             </a:pPr>
             <a:r>
-              <a:rPr sz="2500" b="1">
+              <a:rPr sz="2400" b="1">
                 <a:solidFill>
                   <a:srgbClr val="FFFFFF"/>
                 </a:solidFill>
                 <a:latin typeface="Arial"/>
               </a:rPr>
-              <a:t>$233</a:t>
+              <a:t>≈48%</a:t>
             </a:r>
             <a:r>
               <a:rPr sz="1050" b="1">
@@ -24380,7 +24170,7 @@
                 </a:solidFill>
                 <a:latin typeface="Calibri"/>
               </a:rPr>
-              <a:t> /т</a:t>
+              <a:t/>
             </a:r>
           </a:p>
         </p:txBody>
@@ -24393,8 +24183,8 @@
         </p:nvSpPr>
         <p:spPr>
           <a:xfrm>
-            <a:off x="6121400" y="4267200"/>
-            <a:ext cx="2387600" cy="279400"/>
+            <a:off x="6121400" y="4216400"/>
+            <a:ext cx="2387600" cy="304800"/>
           </a:xfrm>
           <a:prstGeom prst="rect">
             <a:avLst/>
@@ -24422,7 +24212,7 @@
                 </a:solidFill>
                 <a:latin typeface="Calibri"/>
               </a:rPr>
-              <a:t>себестоимость ОМУ NPK 8-21 против цены $450</a:t>
+              <a:t>валовая маржа ОМУ · $233 себест. → $450 цена</a:t>
             </a:r>
           </a:p>
         </p:txBody>
@@ -24623,7 +24413,7 @@
         </p:nvSpPr>
         <p:spPr>
           <a:xfrm>
-            <a:off x="508000" y="304800"/>
+            <a:off x="508000" y="330200"/>
             <a:ext cx="8140700" cy="203200"/>
           </a:xfrm>
           <a:prstGeom prst="rect">
@@ -24701,7 +24491,7 @@
         </p:nvSpPr>
         <p:spPr>
           <a:xfrm>
-            <a:off x="508000" y="939800"/>
+            <a:off x="508000" y="927100"/>
             <a:ext cx="8229600" cy="228600"/>
           </a:xfrm>
           <a:prstGeom prst="rect">
@@ -24727,21 +24517,57 @@
                 </a:solidFill>
                 <a:latin typeface="Calibri"/>
               </a:rPr>
-              <a:t>Спрос ≈ 208 млн т питательных веществ (N+P+K) в 2025; рост 1–2%/год до ~224 млн т к 2029 (IFA)</a:t>
-            </a:r>
-          </a:p>
-        </p:txBody>
-      </p:sp>
-      <p:sp>
-        <p:nvSpPr>
-          <p:cNvPr id="5" name="Rounded Rectangle 4"/>
-          <p:cNvSpPr/>
-          <p:nvPr/>
-        </p:nvSpPr>
-        <p:spPr>
-          <a:xfrm>
-            <a:off x="508000" y="1320800"/>
-            <a:ext cx="4978400" cy="2514600"/>
+              <a:t>Спрос ≈ 208 млн т питательных веществ (N+P+K) в 2025; рост 1–2%/год до ~224 млн т к 2029</a:t>
+            </a:r>
+          </a:p>
+        </p:txBody>
+      </p:sp>
+      <p:cxnSp>
+        <p:nvCxnSpPr>
+          <p:cNvPr id="5" name="Connector 4"/>
+          <p:cNvCxnSpPr/>
+          <p:nvPr/>
+        </p:nvCxnSpPr>
+        <p:spPr>
+          <a:xfrm>
+            <a:off x="508000" y="1231900"/>
+            <a:ext cx="8140700" cy="0"/>
+          </a:xfrm>
+          <a:prstGeom prst="line">
+            <a:avLst/>
+          </a:prstGeom>
+          <a:ln w="9525">
+            <a:solidFill>
+              <a:srgbClr val="DCE3EB"/>
+            </a:solidFill>
+          </a:ln>
+          <a:effectLst/>
+        </p:spPr>
+        <p:style>
+          <a:lnRef idx="2">
+            <a:schemeClr val="accent1"/>
+          </a:lnRef>
+          <a:fillRef idx="0">
+            <a:schemeClr val="accent1"/>
+          </a:fillRef>
+          <a:effectRef idx="1">
+            <a:schemeClr val="accent1"/>
+          </a:effectRef>
+          <a:fontRef idx="minor">
+            <a:schemeClr val="tx1"/>
+          </a:fontRef>
+        </p:style>
+      </p:cxnSp>
+      <p:sp>
+        <p:nvSpPr>
+          <p:cNvPr id="6" name="Rounded Rectangle 5"/>
+          <p:cNvSpPr/>
+          <p:nvPr/>
+        </p:nvSpPr>
+        <p:spPr>
+          <a:xfrm>
+            <a:off x="508000" y="1346200"/>
+            <a:ext cx="4978400" cy="2362200"/>
           </a:xfrm>
           <a:prstGeom prst="roundRect">
             <a:avLst>
@@ -24788,14 +24614,14 @@
       </p:sp>
       <p:sp>
         <p:nvSpPr>
-          <p:cNvPr id="6" name="TextBox 5"/>
+          <p:cNvPr id="7" name="TextBox 6"/>
           <p:cNvSpPr txBox="1"/>
           <p:nvPr/>
         </p:nvSpPr>
         <p:spPr>
           <a:xfrm>
-            <a:off x="685800" y="1447800"/>
-            <a:ext cx="4572000" cy="203200"/>
+            <a:off x="685800" y="1473200"/>
+            <a:ext cx="4572000" cy="177800"/>
           </a:xfrm>
           <a:prstGeom prst="rect">
             <a:avLst/>
@@ -24827,14 +24653,14 @@
       </p:sp>
       <p:graphicFrame>
         <p:nvGraphicFramePr>
-          <p:cNvPr id="7" name="Chart 6"/>
+          <p:cNvPr id="8" name="Chart 7"/>
           <p:cNvGraphicFramePr>
             <a:graphicFrameLocks noGrp="1"/>
           </p:cNvGraphicFramePr>
           <p:nvPr/>
         </p:nvGraphicFramePr>
         <p:xfrm>
-          <a:off x="584200" y="1676400"/>
+          <a:off x="584200" y="1701800"/>
           <a:ext cx="4826000" cy="1905000"/>
         </p:xfrm>
         <a:graphic>
@@ -24845,14 +24671,14 @@
       </p:graphicFrame>
       <p:sp>
         <p:nvSpPr>
-          <p:cNvPr id="8" name="Rounded Rectangle 7"/>
-          <p:cNvSpPr/>
-          <p:nvPr/>
-        </p:nvSpPr>
-        <p:spPr>
-          <a:xfrm>
-            <a:off x="5613400" y="1320800"/>
-            <a:ext cx="3022600" cy="1219200"/>
+          <p:cNvPr id="9" name="Rounded Rectangle 8"/>
+          <p:cNvSpPr/>
+          <p:nvPr/>
+        </p:nvSpPr>
+        <p:spPr>
+          <a:xfrm>
+            <a:off x="5613400" y="1346200"/>
+            <a:ext cx="3022600" cy="1092200"/>
           </a:xfrm>
           <a:prstGeom prst="roundRect">
             <a:avLst>
@@ -24899,13 +24725,13 @@
       </p:sp>
       <p:sp>
         <p:nvSpPr>
-          <p:cNvPr id="9" name="TextBox 8"/>
+          <p:cNvPr id="10" name="TextBox 9"/>
           <p:cNvSpPr txBox="1"/>
           <p:nvPr/>
         </p:nvSpPr>
         <p:spPr>
           <a:xfrm>
-            <a:off x="5791200" y="1447800"/>
+            <a:off x="5791200" y="1460500"/>
             <a:ext cx="2667000" cy="177800"/>
           </a:xfrm>
           <a:prstGeom prst="rect">
@@ -24938,13 +24764,13 @@
       </p:sp>
       <p:sp>
         <p:nvSpPr>
-          <p:cNvPr id="10" name="Rectangle 9"/>
-          <p:cNvSpPr/>
-          <p:nvPr/>
-        </p:nvSpPr>
-        <p:spPr>
-          <a:xfrm>
-            <a:off x="5791200" y="1752600"/>
+          <p:cNvPr id="11" name="Rectangle 10"/>
+          <p:cNvSpPr/>
+          <p:nvPr/>
+        </p:nvSpPr>
+        <p:spPr>
+          <a:xfrm>
+            <a:off x="5791200" y="1739900"/>
             <a:ext cx="1493520" cy="254000"/>
           </a:xfrm>
           <a:prstGeom prst="rect">
@@ -24982,13 +24808,13 @@
       </p:sp>
       <p:sp>
         <p:nvSpPr>
-          <p:cNvPr id="11" name="TextBox 10"/>
+          <p:cNvPr id="12" name="TextBox 11"/>
           <p:cNvSpPr txBox="1"/>
           <p:nvPr/>
         </p:nvSpPr>
         <p:spPr>
           <a:xfrm>
-            <a:off x="5791200" y="1752600"/>
+            <a:off x="5791200" y="1739900"/>
             <a:ext cx="1493520" cy="254000"/>
           </a:xfrm>
           <a:prstGeom prst="rect">
@@ -25021,13 +24847,13 @@
       </p:sp>
       <p:sp>
         <p:nvSpPr>
-          <p:cNvPr id="12" name="Rectangle 11"/>
-          <p:cNvSpPr/>
-          <p:nvPr/>
-        </p:nvSpPr>
-        <p:spPr>
-          <a:xfrm>
-            <a:off x="7284720" y="1752600"/>
+          <p:cNvPr id="13" name="Rectangle 12"/>
+          <p:cNvSpPr/>
+          <p:nvPr/>
+        </p:nvSpPr>
+        <p:spPr>
+          <a:xfrm>
+            <a:off x="7284720" y="1739900"/>
             <a:ext cx="613410" cy="254000"/>
           </a:xfrm>
           <a:prstGeom prst="rect">
@@ -25065,13 +24891,13 @@
       </p:sp>
       <p:sp>
         <p:nvSpPr>
-          <p:cNvPr id="13" name="TextBox 12"/>
+          <p:cNvPr id="14" name="TextBox 13"/>
           <p:cNvSpPr txBox="1"/>
           <p:nvPr/>
         </p:nvSpPr>
         <p:spPr>
           <a:xfrm>
-            <a:off x="7284720" y="1752600"/>
+            <a:off x="7284720" y="1739900"/>
             <a:ext cx="613410" cy="254000"/>
           </a:xfrm>
           <a:prstGeom prst="rect">
@@ -25104,13 +24930,13 @@
       </p:sp>
       <p:sp>
         <p:nvSpPr>
-          <p:cNvPr id="14" name="Rectangle 13"/>
-          <p:cNvSpPr/>
-          <p:nvPr/>
-        </p:nvSpPr>
-        <p:spPr>
-          <a:xfrm>
-            <a:off x="7898130" y="1752600"/>
+          <p:cNvPr id="15" name="Rectangle 14"/>
+          <p:cNvSpPr/>
+          <p:nvPr/>
+        </p:nvSpPr>
+        <p:spPr>
+          <a:xfrm>
+            <a:off x="7898130" y="1739900"/>
             <a:ext cx="560070" cy="254000"/>
           </a:xfrm>
           <a:prstGeom prst="rect">
@@ -25148,13 +24974,13 @@
       </p:sp>
       <p:sp>
         <p:nvSpPr>
-          <p:cNvPr id="15" name="TextBox 14"/>
+          <p:cNvPr id="16" name="TextBox 15"/>
           <p:cNvSpPr txBox="1"/>
           <p:nvPr/>
         </p:nvSpPr>
         <p:spPr>
           <a:xfrm>
-            <a:off x="7898130" y="1752600"/>
+            <a:off x="7898130" y="1739900"/>
             <a:ext cx="560070" cy="254000"/>
           </a:xfrm>
           <a:prstGeom prst="rect">
@@ -25187,14 +25013,14 @@
       </p:sp>
       <p:sp>
         <p:nvSpPr>
-          <p:cNvPr id="16" name="TextBox 15"/>
+          <p:cNvPr id="17" name="TextBox 16"/>
           <p:cNvSpPr txBox="1"/>
           <p:nvPr/>
         </p:nvSpPr>
         <p:spPr>
           <a:xfrm>
-            <a:off x="5791200" y="2108200"/>
-            <a:ext cx="2717800" cy="330200"/>
+            <a:off x="5791200" y="2082800"/>
+            <a:ext cx="2717800" cy="254000"/>
           </a:xfrm>
           <a:prstGeom prst="rect">
             <a:avLst/>
@@ -25208,9 +25034,6 @@
           <a:lstStyle/>
           <a:p>
             <a:pPr algn="l">
-              <a:lnSpc>
-                <a:spcPct val="110000"/>
-              </a:lnSpc>
               <a:spcBef>
                 <a:spcPts val="0"/>
               </a:spcBef>
@@ -25225,13 +25048,13 @@
               <a:t>■ </a:t>
             </a:r>
             <a:r>
-              <a:rPr sz="850" b="0">
+              <a:rPr sz="830" b="0">
                 <a:solidFill>
                   <a:srgbClr val="2A3746"/>
                 </a:solidFill>
                 <a:latin typeface="Calibri"/>
               </a:rPr>
-              <a:t>Азот (N) 116 млн т   </a:t>
+              <a:t>Азот 116   </a:t>
             </a:r>
             <a:r>
               <a:rPr sz="900" b="1">
@@ -25243,7 +25066,7 @@
               <a:t>■ </a:t>
             </a:r>
             <a:r>
-              <a:rPr sz="850" b="0">
+              <a:rPr sz="830" b="0">
                 <a:solidFill>
                   <a:srgbClr val="2A3746"/>
                 </a:solidFill>
@@ -25261,7 +25084,7 @@
               <a:t>■ </a:t>
             </a:r>
             <a:r>
-              <a:rPr sz="850" b="0">
+              <a:rPr sz="830" b="0">
                 <a:solidFill>
                   <a:srgbClr val="2A3746"/>
                 </a:solidFill>
@@ -25274,13 +25097,13 @@
       </p:sp>
       <p:sp>
         <p:nvSpPr>
-          <p:cNvPr id="17" name="Rounded Rectangle 16"/>
-          <p:cNvSpPr/>
-          <p:nvPr/>
-        </p:nvSpPr>
-        <p:spPr>
-          <a:xfrm>
-            <a:off x="5613400" y="2641600"/>
+          <p:cNvPr id="18" name="Rounded Rectangle 17"/>
+          <p:cNvSpPr/>
+          <p:nvPr/>
+        </p:nvSpPr>
+        <p:spPr>
+          <a:xfrm>
+            <a:off x="5613400" y="2514600"/>
             <a:ext cx="3022600" cy="558800"/>
           </a:xfrm>
           <a:prstGeom prst="roundRect">
@@ -25328,13 +25151,13 @@
       </p:sp>
       <p:sp>
         <p:nvSpPr>
-          <p:cNvPr id="18" name="Rectangle 17"/>
-          <p:cNvSpPr/>
-          <p:nvPr/>
-        </p:nvSpPr>
-        <p:spPr>
-          <a:xfrm>
-            <a:off x="5638800" y="2705100"/>
+          <p:cNvPr id="19" name="Rectangle 18"/>
+          <p:cNvSpPr/>
+          <p:nvPr/>
+        </p:nvSpPr>
+        <p:spPr>
+          <a:xfrm>
+            <a:off x="5638800" y="2578100"/>
             <a:ext cx="38100" cy="431800"/>
           </a:xfrm>
           <a:prstGeom prst="rect">
@@ -25372,13 +25195,13 @@
       </p:sp>
       <p:sp>
         <p:nvSpPr>
-          <p:cNvPr id="19" name="TextBox 18"/>
+          <p:cNvPr id="20" name="TextBox 19"/>
           <p:cNvSpPr txBox="1"/>
           <p:nvPr/>
         </p:nvSpPr>
         <p:spPr>
           <a:xfrm>
-            <a:off x="5791200" y="2717800"/>
+            <a:off x="5791200" y="2590800"/>
             <a:ext cx="2743200" cy="304800"/>
           </a:xfrm>
           <a:prstGeom prst="rect">
@@ -25398,13 +25221,13 @@
               </a:spcBef>
             </a:pPr>
             <a:r>
-              <a:rPr sz="2300" b="1">
+              <a:rPr sz="2000" b="1">
                 <a:solidFill>
                   <a:srgbClr val="2F6690"/>
                 </a:solidFill>
                 <a:latin typeface="Arial"/>
               </a:rPr>
-              <a:t>208</a:t>
+              <a:t>204→208</a:t>
             </a:r>
             <a:r>
               <a:rPr sz="1050" b="1">
@@ -25420,13 +25243,13 @@
       </p:sp>
       <p:sp>
         <p:nvSpPr>
-          <p:cNvPr id="20" name="TextBox 19"/>
+          <p:cNvPr id="21" name="TextBox 20"/>
           <p:cNvSpPr txBox="1"/>
           <p:nvPr/>
         </p:nvSpPr>
         <p:spPr>
           <a:xfrm>
-            <a:off x="5791200" y="3022600"/>
+            <a:off x="5791200" y="2895600"/>
             <a:ext cx="2717800" cy="152400"/>
           </a:xfrm>
           <a:prstGeom prst="rect">
@@ -25455,20 +25278,20 @@
                 </a:solidFill>
                 <a:latin typeface="Calibri"/>
               </a:rPr>
-              <a:t>мировое потребление пит. в-в, 2025 (+2% г/г)</a:t>
-            </a:r>
-          </a:p>
-        </p:txBody>
-      </p:sp>
-      <p:sp>
-        <p:nvSpPr>
-          <p:cNvPr id="21" name="Rounded Rectangle 20"/>
-          <p:cNvSpPr/>
-          <p:nvPr/>
-        </p:nvSpPr>
-        <p:spPr>
-          <a:xfrm>
-            <a:off x="5613400" y="3251200"/>
+              <a:t>мировое потребление, 2024→2025 (рекорд)</a:t>
+            </a:r>
+          </a:p>
+        </p:txBody>
+      </p:sp>
+      <p:sp>
+        <p:nvSpPr>
+          <p:cNvPr id="22" name="Rounded Rectangle 21"/>
+          <p:cNvSpPr/>
+          <p:nvPr/>
+        </p:nvSpPr>
+        <p:spPr>
+          <a:xfrm>
+            <a:off x="5613400" y="3136900"/>
             <a:ext cx="3022600" cy="558800"/>
           </a:xfrm>
           <a:prstGeom prst="roundRect">
@@ -25516,13 +25339,13 @@
       </p:sp>
       <p:sp>
         <p:nvSpPr>
-          <p:cNvPr id="22" name="Rectangle 21"/>
-          <p:cNvSpPr/>
-          <p:nvPr/>
-        </p:nvSpPr>
-        <p:spPr>
-          <a:xfrm>
-            <a:off x="5638800" y="3314700"/>
+          <p:cNvPr id="23" name="Rectangle 22"/>
+          <p:cNvSpPr/>
+          <p:nvPr/>
+        </p:nvSpPr>
+        <p:spPr>
+          <a:xfrm>
+            <a:off x="5638800" y="3200400"/>
             <a:ext cx="38100" cy="431800"/>
           </a:xfrm>
           <a:prstGeom prst="rect">
@@ -25560,13 +25383,13 @@
       </p:sp>
       <p:sp>
         <p:nvSpPr>
-          <p:cNvPr id="23" name="TextBox 22"/>
+          <p:cNvPr id="24" name="TextBox 23"/>
           <p:cNvSpPr txBox="1"/>
           <p:nvPr/>
         </p:nvSpPr>
         <p:spPr>
           <a:xfrm>
-            <a:off x="5791200" y="3327400"/>
+            <a:off x="5791200" y="3213100"/>
             <a:ext cx="2743200" cy="304800"/>
           </a:xfrm>
           <a:prstGeom prst="rect">
@@ -25586,7 +25409,7 @@
               </a:spcBef>
             </a:pPr>
             <a:r>
-              <a:rPr sz="2300" b="1">
+              <a:rPr sz="2200" b="1">
                 <a:solidFill>
                   <a:srgbClr val="C4772F"/>
                 </a:solidFill>
@@ -25608,13 +25431,13 @@
       </p:sp>
       <p:sp>
         <p:nvSpPr>
-          <p:cNvPr id="24" name="TextBox 23"/>
+          <p:cNvPr id="25" name="TextBox 24"/>
           <p:cNvSpPr txBox="1"/>
           <p:nvPr/>
         </p:nvSpPr>
         <p:spPr>
           <a:xfrm>
-            <a:off x="5791200" y="3632200"/>
+            <a:off x="5791200" y="3517900"/>
             <a:ext cx="2717800" cy="152400"/>
           </a:xfrm>
           <a:prstGeom prst="rect">
@@ -25650,13 +25473,13 @@
       </p:sp>
       <p:sp>
         <p:nvSpPr>
-          <p:cNvPr id="25" name="Rounded Rectangle 24"/>
-          <p:cNvSpPr/>
-          <p:nvPr/>
-        </p:nvSpPr>
-        <p:spPr>
-          <a:xfrm>
-            <a:off x="508000" y="3962400"/>
+          <p:cNvPr id="26" name="Rounded Rectangle 25"/>
+          <p:cNvSpPr/>
+          <p:nvPr/>
+        </p:nvSpPr>
+        <p:spPr>
+          <a:xfrm>
+            <a:off x="508000" y="3860800"/>
             <a:ext cx="8128000" cy="558800"/>
           </a:xfrm>
           <a:prstGeom prst="roundRect">
@@ -25696,13 +25519,13 @@
       </p:sp>
       <p:sp>
         <p:nvSpPr>
-          <p:cNvPr id="26" name="TextBox 25"/>
+          <p:cNvPr id="27" name="TextBox 26"/>
           <p:cNvSpPr txBox="1"/>
           <p:nvPr/>
         </p:nvSpPr>
         <p:spPr>
           <a:xfrm>
-            <a:off x="711200" y="3962400"/>
+            <a:off x="711200" y="3860800"/>
             <a:ext cx="7747000" cy="558800"/>
           </a:xfrm>
           <a:prstGeom prst="rect">
@@ -25731,7 +25554,7 @@
                 </a:solidFill>
                 <a:latin typeface="Calibri"/>
               </a:rPr>
-              <a:t>ЦЕНЫ НА 30.06.2026:  </a:t>
+              <a:t>ЦЕНЫ 06.2026:  </a:t>
             </a:r>
             <a:r>
               <a:rPr sz="950" b="0">
@@ -25740,14 +25563,53 @@
                 </a:solidFill>
                 <a:latin typeface="Calibri"/>
               </a:rPr>
-              <a:t>карбамид ≈ $700/т, аммофос (DAP) ≈ $720/т — рост ~60–80% с начала года на фоне перебоев поставок через Ормузский пролив; ослабление ожидается в 2027 (World Bank).</a:t>
+              <a:t>карбамид ≈ $700/т, DAP ≈ $720/т (+60–80% с начала года) — рост от перебоев через Ормузский пролив, а не от дефицита; локальное сырьё защищает маржу ОМУ. Ослабление ожидается в 2027 (World Bank).</a:t>
+            </a:r>
+          </a:p>
+        </p:txBody>
+      </p:sp>
+      <p:sp>
+        <p:nvSpPr>
+          <p:cNvPr id="28" name="TextBox 27"/>
+          <p:cNvSpPr txBox="1"/>
+          <p:nvPr/>
+        </p:nvSpPr>
+        <p:spPr>
+          <a:xfrm>
+            <a:off x="508000" y="4572000"/>
+            <a:ext cx="7112000" cy="152400"/>
+          </a:xfrm>
+          <a:prstGeom prst="rect">
+            <a:avLst/>
+          </a:prstGeom>
+          <a:noFill/>
+        </p:spPr>
+        <p:txBody>
+          <a:bodyPr wrap="square" anchor="t" lIns="0" rIns="0" tIns="0" bIns="0">
+            <a:spAutoFit/>
+          </a:bodyPr>
+          <a:lstStyle/>
+          <a:p>
+            <a:pPr algn="l">
+              <a:spcBef>
+                <a:spcPts val="0"/>
+              </a:spcBef>
+            </a:pPr>
+            <a:r>
+              <a:rPr sz="700" b="0">
+                <a:solidFill>
+                  <a:srgbClr val="9AA6B3"/>
+                </a:solidFill>
+                <a:latin typeface="Calibri"/>
+              </a:rPr>
+              <a:t>Источники: IFA Medium-Term Fertilizer Outlook 2025–2029; World Bank Commodity Markets, 06.2026. Основа: питательные вещества (N+P₂O₅+K₂O).</a:t>
             </a:r>
           </a:p>
         </p:txBody>
       </p:sp>
       <p:cxnSp>
         <p:nvCxnSpPr>
-          <p:cNvPr id="27" name="Connector 26"/>
+          <p:cNvPr id="29" name="Connector 28"/>
           <p:cNvCxnSpPr/>
           <p:nvPr/>
         </p:nvCxnSpPr>
@@ -25783,7 +25645,7 @@
       </p:cxnSp>
       <p:sp>
         <p:nvSpPr>
-          <p:cNvPr id="28" name="TextBox 27"/>
+          <p:cNvPr id="30" name="TextBox 29"/>
           <p:cNvSpPr txBox="1"/>
           <p:nvPr/>
         </p:nvSpPr>
@@ -25831,7 +25693,7 @@
       </p:sp>
       <p:sp>
         <p:nvSpPr>
-          <p:cNvPr id="29" name="TextBox 28"/>
+          <p:cNvPr id="31" name="TextBox 30"/>
           <p:cNvSpPr txBox="1"/>
           <p:nvPr/>
         </p:nvSpPr>
@@ -25870,7 +25732,7 @@
       </p:sp>
       <p:sp>
         <p:nvSpPr>
-          <p:cNvPr id="30" name="TextBox 29"/>
+          <p:cNvPr id="32" name="TextBox 31"/>
           <p:cNvSpPr txBox="1"/>
           <p:nvPr/>
         </p:nvSpPr>
@@ -25941,7 +25803,7 @@
         </p:nvSpPr>
         <p:spPr>
           <a:xfrm>
-            <a:off x="508000" y="304800"/>
+            <a:off x="508000" y="330200"/>
             <a:ext cx="8140700" cy="203200"/>
           </a:xfrm>
           <a:prstGeom prst="rect">
@@ -26019,7 +25881,7 @@
         </p:nvSpPr>
         <p:spPr>
           <a:xfrm>
-            <a:off x="508000" y="939800"/>
+            <a:off x="508000" y="927100"/>
             <a:ext cx="8229600" cy="228600"/>
           </a:xfrm>
           <a:prstGeom prst="rect">
@@ -26045,21 +25907,57 @@
                 </a:solidFill>
                 <a:latin typeface="Calibri"/>
               </a:rPr>
-              <a:t>Ёмкость рынка ≈ 1,3 млн т в 2025 (+19% г/г); внесение 4–5 кг/га против агрономической нормы 80–100 кг/га</a:t>
-            </a:r>
-          </a:p>
-        </p:txBody>
-      </p:sp>
-      <p:sp>
-        <p:nvSpPr>
-          <p:cNvPr id="5" name="Rounded Rectangle 4"/>
-          <p:cNvSpPr/>
-          <p:nvPr/>
-        </p:nvSpPr>
-        <p:spPr>
-          <a:xfrm>
-            <a:off x="508000" y="1320800"/>
-            <a:ext cx="4978400" cy="2514600"/>
+              <a:t>Ёмкость ≈ 1,3 млн т в 2025 (+19% г/г); внесение 4–5 кг/га против агрономической нормы 80–100 кг/га</a:t>
+            </a:r>
+          </a:p>
+        </p:txBody>
+      </p:sp>
+      <p:cxnSp>
+        <p:nvCxnSpPr>
+          <p:cNvPr id="5" name="Connector 4"/>
+          <p:cNvCxnSpPr/>
+          <p:nvPr/>
+        </p:nvCxnSpPr>
+        <p:spPr>
+          <a:xfrm>
+            <a:off x="508000" y="1231900"/>
+            <a:ext cx="8140700" cy="0"/>
+          </a:xfrm>
+          <a:prstGeom prst="line">
+            <a:avLst/>
+          </a:prstGeom>
+          <a:ln w="9525">
+            <a:solidFill>
+              <a:srgbClr val="DCE3EB"/>
+            </a:solidFill>
+          </a:ln>
+          <a:effectLst/>
+        </p:spPr>
+        <p:style>
+          <a:lnRef idx="2">
+            <a:schemeClr val="accent1"/>
+          </a:lnRef>
+          <a:fillRef idx="0">
+            <a:schemeClr val="accent1"/>
+          </a:fillRef>
+          <a:effectRef idx="1">
+            <a:schemeClr val="accent1"/>
+          </a:effectRef>
+          <a:fontRef idx="minor">
+            <a:schemeClr val="tx1"/>
+          </a:fontRef>
+        </p:style>
+      </p:cxnSp>
+      <p:sp>
+        <p:nvSpPr>
+          <p:cNvPr id="6" name="Rounded Rectangle 5"/>
+          <p:cNvSpPr/>
+          <p:nvPr/>
+        </p:nvSpPr>
+        <p:spPr>
+          <a:xfrm>
+            <a:off x="508000" y="1346200"/>
+            <a:ext cx="4978400" cy="2362200"/>
           </a:xfrm>
           <a:prstGeom prst="roundRect">
             <a:avLst>
@@ -26106,14 +26004,14 @@
       </p:sp>
       <p:sp>
         <p:nvSpPr>
-          <p:cNvPr id="6" name="TextBox 5"/>
+          <p:cNvPr id="7" name="TextBox 6"/>
           <p:cNvSpPr txBox="1"/>
           <p:nvPr/>
         </p:nvSpPr>
         <p:spPr>
           <a:xfrm>
-            <a:off x="685800" y="1447800"/>
-            <a:ext cx="4572000" cy="203200"/>
+            <a:off x="685800" y="1460500"/>
+            <a:ext cx="4572000" cy="177800"/>
           </a:xfrm>
           <a:prstGeom prst="rect">
             <a:avLst/>
@@ -26143,16 +26041,55 @@
           </a:p>
         </p:txBody>
       </p:sp>
+      <p:sp>
+        <p:nvSpPr>
+          <p:cNvPr id="8" name="TextBox 7"/>
+          <p:cNvSpPr txBox="1"/>
+          <p:nvPr/>
+        </p:nvSpPr>
+        <p:spPr>
+          <a:xfrm>
+            <a:off x="3175000" y="1473200"/>
+            <a:ext cx="2235200" cy="152400"/>
+          </a:xfrm>
+          <a:prstGeom prst="rect">
+            <a:avLst/>
+          </a:prstGeom>
+          <a:noFill/>
+        </p:spPr>
+        <p:txBody>
+          <a:bodyPr wrap="square" anchor="t" lIns="0" rIns="0" tIns="0" bIns="0">
+            <a:spAutoFit/>
+          </a:bodyPr>
+          <a:lstStyle/>
+          <a:p>
+            <a:pPr algn="r">
+              <a:spcBef>
+                <a:spcPts val="0"/>
+              </a:spcBef>
+            </a:pPr>
+            <a:r>
+              <a:rPr sz="800" b="1">
+                <a:solidFill>
+                  <a:srgbClr val="C4772F"/>
+                </a:solidFill>
+                <a:latin typeface="Calibri"/>
+              </a:rPr>
+              <a:t>агронорма 80–100 кг/га</a:t>
+            </a:r>
+          </a:p>
+        </p:txBody>
+      </p:sp>
       <p:graphicFrame>
         <p:nvGraphicFramePr>
-          <p:cNvPr id="7" name="Chart 6"/>
+          <p:cNvPr id="9" name="Chart 8"/>
           <p:cNvGraphicFramePr>
             <a:graphicFrameLocks noGrp="1"/>
           </p:cNvGraphicFramePr>
           <p:nvPr/>
         </p:nvGraphicFramePr>
         <p:xfrm>
-          <a:off x="584200" y="1701800"/>
+          <a:off x="584200" y="1752600"/>
           <a:ext cx="4826000" cy="1854200"/>
         </p:xfrm>
         <a:graphic>
@@ -26163,13 +26100,13 @@
       </p:graphicFrame>
       <p:sp>
         <p:nvSpPr>
-          <p:cNvPr id="8" name="Rounded Rectangle 7"/>
-          <p:cNvSpPr/>
-          <p:nvPr/>
-        </p:nvSpPr>
-        <p:spPr>
-          <a:xfrm>
-            <a:off x="5613400" y="1320800"/>
+          <p:cNvPr id="10" name="Rounded Rectangle 9"/>
+          <p:cNvSpPr/>
+          <p:nvPr/>
+        </p:nvSpPr>
+        <p:spPr>
+          <a:xfrm>
+            <a:off x="5613400" y="1346200"/>
             <a:ext cx="3022600" cy="558800"/>
           </a:xfrm>
           <a:prstGeom prst="roundRect">
@@ -26217,13 +26154,13 @@
       </p:sp>
       <p:sp>
         <p:nvSpPr>
-          <p:cNvPr id="9" name="Rectangle 8"/>
-          <p:cNvSpPr/>
-          <p:nvPr/>
-        </p:nvSpPr>
-        <p:spPr>
-          <a:xfrm>
-            <a:off x="5638800" y="1384300"/>
+          <p:cNvPr id="11" name="Rectangle 10"/>
+          <p:cNvSpPr/>
+          <p:nvPr/>
+        </p:nvSpPr>
+        <p:spPr>
+          <a:xfrm>
+            <a:off x="5638800" y="1409700"/>
             <a:ext cx="38100" cy="431800"/>
           </a:xfrm>
           <a:prstGeom prst="rect">
@@ -26261,13 +26198,13 @@
       </p:sp>
       <p:sp>
         <p:nvSpPr>
-          <p:cNvPr id="10" name="TextBox 9"/>
+          <p:cNvPr id="12" name="TextBox 11"/>
           <p:cNvSpPr txBox="1"/>
           <p:nvPr/>
         </p:nvSpPr>
         <p:spPr>
           <a:xfrm>
-            <a:off x="5791200" y="1397000"/>
+            <a:off x="5791200" y="1422400"/>
             <a:ext cx="2743200" cy="304800"/>
           </a:xfrm>
           <a:prstGeom prst="rect">
@@ -26287,7 +26224,7 @@
               </a:spcBef>
             </a:pPr>
             <a:r>
-              <a:rPr sz="2300" b="1">
+              <a:rPr sz="2200" b="1">
                 <a:solidFill>
                   <a:srgbClr val="2F6690"/>
                 </a:solidFill>
@@ -26309,13 +26246,13 @@
       </p:sp>
       <p:sp>
         <p:nvSpPr>
-          <p:cNvPr id="11" name="TextBox 10"/>
+          <p:cNvPr id="13" name="TextBox 12"/>
           <p:cNvSpPr txBox="1"/>
           <p:nvPr/>
         </p:nvSpPr>
         <p:spPr>
           <a:xfrm>
-            <a:off x="5791200" y="1701800"/>
+            <a:off x="5791200" y="1727200"/>
             <a:ext cx="2717800" cy="152400"/>
           </a:xfrm>
           <a:prstGeom prst="rect">
@@ -26344,20 +26281,20 @@
                 </a:solidFill>
                 <a:latin typeface="Calibri"/>
               </a:rPr>
-              <a:t>ёмкость рынка удобрений РК, 2025 (+19% г/г)</a:t>
-            </a:r>
-          </a:p>
-        </p:txBody>
-      </p:sp>
-      <p:sp>
-        <p:nvSpPr>
-          <p:cNvPr id="12" name="Rounded Rectangle 11"/>
-          <p:cNvSpPr/>
-          <p:nvPr/>
-        </p:nvSpPr>
-        <p:spPr>
-          <a:xfrm>
-            <a:off x="5613400" y="1930400"/>
+              <a:t>ёмкость рынка РК, 2025 (+19% г/г)</a:t>
+            </a:r>
+          </a:p>
+        </p:txBody>
+      </p:sp>
+      <p:sp>
+        <p:nvSpPr>
+          <p:cNvPr id="14" name="Rounded Rectangle 13"/>
+          <p:cNvSpPr/>
+          <p:nvPr/>
+        </p:nvSpPr>
+        <p:spPr>
+          <a:xfrm>
+            <a:off x="5613400" y="1955800"/>
             <a:ext cx="3022600" cy="558800"/>
           </a:xfrm>
           <a:prstGeom prst="roundRect">
@@ -26405,13 +26342,13 @@
       </p:sp>
       <p:sp>
         <p:nvSpPr>
-          <p:cNvPr id="13" name="Rectangle 12"/>
-          <p:cNvSpPr/>
-          <p:nvPr/>
-        </p:nvSpPr>
-        <p:spPr>
-          <a:xfrm>
-            <a:off x="5638800" y="1993900"/>
+          <p:cNvPr id="15" name="Rectangle 14"/>
+          <p:cNvSpPr/>
+          <p:nvPr/>
+        </p:nvSpPr>
+        <p:spPr>
+          <a:xfrm>
+            <a:off x="5638800" y="2019300"/>
             <a:ext cx="38100" cy="431800"/>
           </a:xfrm>
           <a:prstGeom prst="rect">
@@ -26449,13 +26386,13 @@
       </p:sp>
       <p:sp>
         <p:nvSpPr>
-          <p:cNvPr id="14" name="TextBox 13"/>
+          <p:cNvPr id="16" name="TextBox 15"/>
           <p:cNvSpPr txBox="1"/>
           <p:nvPr/>
         </p:nvSpPr>
         <p:spPr>
           <a:xfrm>
-            <a:off x="5791200" y="2006600"/>
+            <a:off x="5791200" y="2032000"/>
             <a:ext cx="2743200" cy="304800"/>
           </a:xfrm>
           <a:prstGeom prst="rect">
@@ -26475,7 +26412,7 @@
               </a:spcBef>
             </a:pPr>
             <a:r>
-              <a:rPr sz="2300" b="1">
+              <a:rPr sz="2200" b="1">
                 <a:solidFill>
                   <a:srgbClr val="C4772F"/>
                 </a:solidFill>
@@ -26497,13 +26434,13 @@
       </p:sp>
       <p:sp>
         <p:nvSpPr>
-          <p:cNvPr id="15" name="TextBox 14"/>
+          <p:cNvPr id="17" name="TextBox 16"/>
           <p:cNvSpPr txBox="1"/>
           <p:nvPr/>
         </p:nvSpPr>
         <p:spPr>
           <a:xfrm>
-            <a:off x="5791200" y="2311400"/>
+            <a:off x="5791200" y="2336800"/>
             <a:ext cx="2717800" cy="152400"/>
           </a:xfrm>
           <a:prstGeom prst="rect">
@@ -26539,13 +26476,13 @@
       </p:sp>
       <p:sp>
         <p:nvSpPr>
-          <p:cNvPr id="16" name="Rounded Rectangle 15"/>
-          <p:cNvSpPr/>
-          <p:nvPr/>
-        </p:nvSpPr>
-        <p:spPr>
-          <a:xfrm>
-            <a:off x="5613400" y="2540000"/>
+          <p:cNvPr id="18" name="Rounded Rectangle 17"/>
+          <p:cNvSpPr/>
+          <p:nvPr/>
+        </p:nvSpPr>
+        <p:spPr>
+          <a:xfrm>
+            <a:off x="5613400" y="2565400"/>
             <a:ext cx="3022600" cy="558800"/>
           </a:xfrm>
           <a:prstGeom prst="roundRect">
@@ -26593,13 +26530,13 @@
       </p:sp>
       <p:sp>
         <p:nvSpPr>
-          <p:cNvPr id="17" name="Rectangle 16"/>
-          <p:cNvSpPr/>
-          <p:nvPr/>
-        </p:nvSpPr>
-        <p:spPr>
-          <a:xfrm>
-            <a:off x="5638800" y="2603500"/>
+          <p:cNvPr id="19" name="Rectangle 18"/>
+          <p:cNvSpPr/>
+          <p:nvPr/>
+        </p:nvSpPr>
+        <p:spPr>
+          <a:xfrm>
+            <a:off x="5638800" y="2628900"/>
             <a:ext cx="38100" cy="431800"/>
           </a:xfrm>
           <a:prstGeom prst="rect">
@@ -26637,13 +26574,13 @@
       </p:sp>
       <p:sp>
         <p:nvSpPr>
-          <p:cNvPr id="18" name="TextBox 17"/>
+          <p:cNvPr id="20" name="TextBox 19"/>
           <p:cNvSpPr txBox="1"/>
           <p:nvPr/>
         </p:nvSpPr>
         <p:spPr>
           <a:xfrm>
-            <a:off x="5791200" y="2616200"/>
+            <a:off x="5791200" y="2641600"/>
             <a:ext cx="2743200" cy="304800"/>
           </a:xfrm>
           <a:prstGeom prst="rect">
@@ -26663,7 +26600,7 @@
               </a:spcBef>
             </a:pPr>
             <a:r>
-              <a:rPr sz="2300" b="1">
+              <a:rPr sz="2200" b="1">
                 <a:solidFill>
                   <a:srgbClr val="2F6690"/>
                 </a:solidFill>
@@ -26685,13 +26622,13 @@
       </p:sp>
       <p:sp>
         <p:nvSpPr>
-          <p:cNvPr id="19" name="TextBox 18"/>
+          <p:cNvPr id="21" name="TextBox 20"/>
           <p:cNvSpPr txBox="1"/>
           <p:nvPr/>
         </p:nvSpPr>
         <p:spPr>
           <a:xfrm>
-            <a:off x="5791200" y="2921000"/>
+            <a:off x="5791200" y="2946400"/>
             <a:ext cx="2717800" cy="152400"/>
           </a:xfrm>
           <a:prstGeom prst="rect">
@@ -26727,14 +26664,14 @@
       </p:sp>
       <p:sp>
         <p:nvSpPr>
-          <p:cNvPr id="20" name="Rounded Rectangle 19"/>
-          <p:cNvSpPr/>
-          <p:nvPr/>
-        </p:nvSpPr>
-        <p:spPr>
-          <a:xfrm>
-            <a:off x="5613400" y="3149600"/>
-            <a:ext cx="3022600" cy="685800"/>
+          <p:cNvPr id="22" name="Rounded Rectangle 21"/>
+          <p:cNvSpPr/>
+          <p:nvPr/>
+        </p:nvSpPr>
+        <p:spPr>
+          <a:xfrm>
+            <a:off x="5613400" y="3175000"/>
+            <a:ext cx="3022600" cy="533400"/>
           </a:xfrm>
           <a:prstGeom prst="roundRect">
             <a:avLst>
@@ -26775,14 +26712,14 @@
       </p:sp>
       <p:sp>
         <p:nvSpPr>
-          <p:cNvPr id="21" name="TextBox 20"/>
+          <p:cNvPr id="23" name="TextBox 22"/>
           <p:cNvSpPr txBox="1"/>
           <p:nvPr/>
         </p:nvSpPr>
         <p:spPr>
           <a:xfrm>
-            <a:off x="5765800" y="3225800"/>
-            <a:ext cx="2717800" cy="152400"/>
+            <a:off x="5765800" y="3238500"/>
+            <a:ext cx="2717800" cy="139700"/>
           </a:xfrm>
           <a:prstGeom prst="rect">
             <a:avLst/>
@@ -26801,7 +26738,7 @@
               </a:spcBef>
             </a:pPr>
             <a:r>
-              <a:rPr sz="760" b="1" spc="60">
+              <a:rPr sz="740" b="1" spc="50">
                 <a:solidFill>
                   <a:srgbClr val="6B7A8D"/>
                 </a:solidFill>
@@ -26814,14 +26751,14 @@
       </p:sp>
       <p:sp>
         <p:nvSpPr>
-          <p:cNvPr id="22" name="TextBox 21"/>
+          <p:cNvPr id="24" name="TextBox 23"/>
           <p:cNvSpPr txBox="1"/>
           <p:nvPr/>
         </p:nvSpPr>
         <p:spPr>
           <a:xfrm>
             <a:off x="5765800" y="3429000"/>
-            <a:ext cx="2717800" cy="330200"/>
+            <a:ext cx="2717800" cy="254000"/>
           </a:xfrm>
           <a:prstGeom prst="rect">
             <a:avLst/>
@@ -26880,13 +26817,13 @@
       </p:sp>
       <p:sp>
         <p:nvSpPr>
-          <p:cNvPr id="23" name="Rounded Rectangle 22"/>
-          <p:cNvSpPr/>
-          <p:nvPr/>
-        </p:nvSpPr>
-        <p:spPr>
-          <a:xfrm>
-            <a:off x="508000" y="3962400"/>
+          <p:cNvPr id="25" name="Rounded Rectangle 24"/>
+          <p:cNvSpPr/>
+          <p:nvPr/>
+        </p:nvSpPr>
+        <p:spPr>
+          <a:xfrm>
+            <a:off x="508000" y="3860800"/>
             <a:ext cx="8128000" cy="558800"/>
           </a:xfrm>
           <a:prstGeom prst="roundRect">
@@ -26926,13 +26863,13 @@
       </p:sp>
       <p:sp>
         <p:nvSpPr>
-          <p:cNvPr id="24" name="TextBox 23"/>
+          <p:cNvPr id="26" name="TextBox 25"/>
           <p:cNvSpPr txBox="1"/>
           <p:nvPr/>
         </p:nvSpPr>
         <p:spPr>
           <a:xfrm>
-            <a:off x="711200" y="3962400"/>
+            <a:off x="711200" y="3860800"/>
             <a:ext cx="7747000" cy="558800"/>
           </a:xfrm>
           <a:prstGeom prst="rect">
@@ -26961,7 +26898,7 @@
                 </a:solidFill>
                 <a:latin typeface="Calibri"/>
               </a:rPr>
-              <a:t>ВЫВОД:  </a:t>
+              <a:t>ИМПОРТОЗАМЕЩЕНИЕ:  </a:t>
             </a:r>
             <a:r>
               <a:rPr sz="950" b="0">
@@ -26970,14 +26907,53 @@
                 </a:solidFill>
                 <a:latin typeface="Calibri"/>
               </a:rPr>
-              <a:t>сверхнизкое внесение и рост импорта (552 → 700 тыс т за 2023–2025) формируют устойчивый спрос на доступные ОМУ и прямой потенциал импортозамещения.</a:t>
+              <a:t>внесение в 15–20× ниже нормы и рост импорта (552 → 700 тыс т за 2023–2025) формируют структурный, растущий спрос на доступные ОМУ; завод (75 тыс т) закрывает ≈ 11% импорта РК.</a:t>
+            </a:r>
+          </a:p>
+        </p:txBody>
+      </p:sp>
+      <p:sp>
+        <p:nvSpPr>
+          <p:cNvPr id="27" name="TextBox 26"/>
+          <p:cNvSpPr txBox="1"/>
+          <p:nvPr/>
+        </p:nvSpPr>
+        <p:spPr>
+          <a:xfrm>
+            <a:off x="508000" y="4572000"/>
+            <a:ext cx="7112000" cy="152400"/>
+          </a:xfrm>
+          <a:prstGeom prst="rect">
+            <a:avLst/>
+          </a:prstGeom>
+          <a:noFill/>
+        </p:spPr>
+        <p:txBody>
+          <a:bodyPr wrap="square" anchor="t" lIns="0" rIns="0" tIns="0" bIns="0">
+            <a:spAutoFit/>
+          </a:bodyPr>
+          <a:lstStyle/>
+          <a:p>
+            <a:pPr algn="l">
+              <a:spcBef>
+                <a:spcPts val="0"/>
+              </a:spcBef>
+            </a:pPr>
+            <a:r>
+              <a:rPr sz="700" b="0">
+                <a:solidFill>
+                  <a:srgbClr val="9AA6B3"/>
+                </a:solidFill>
+                <a:latin typeface="Calibri"/>
+              </a:rPr>
+              <a:t>Источники: Бюро нацстатистики РК; EnergyProm / ElDala, 2025; FAO, World Bank (внесение). Показатели — товарный тоннаж.</a:t>
             </a:r>
           </a:p>
         </p:txBody>
       </p:sp>
       <p:cxnSp>
         <p:nvCxnSpPr>
-          <p:cNvPr id="25" name="Connector 24"/>
+          <p:cNvPr id="28" name="Connector 27"/>
           <p:cNvCxnSpPr/>
           <p:nvPr/>
         </p:nvCxnSpPr>
@@ -27013,7 +26989,7 @@
       </p:cxnSp>
       <p:sp>
         <p:nvSpPr>
-          <p:cNvPr id="26" name="TextBox 25"/>
+          <p:cNvPr id="29" name="TextBox 28"/>
           <p:cNvSpPr txBox="1"/>
           <p:nvPr/>
         </p:nvSpPr>
@@ -27061,7 +27037,7 @@
       </p:sp>
       <p:sp>
         <p:nvSpPr>
-          <p:cNvPr id="27" name="TextBox 26"/>
+          <p:cNvPr id="30" name="TextBox 29"/>
           <p:cNvSpPr txBox="1"/>
           <p:nvPr/>
         </p:nvSpPr>
@@ -27100,7 +27076,7 @@
       </p:sp>
       <p:sp>
         <p:nvSpPr>
-          <p:cNvPr id="28" name="TextBox 27"/>
+          <p:cNvPr id="31" name="TextBox 30"/>
           <p:cNvSpPr txBox="1"/>
           <p:nvPr/>
         </p:nvSpPr>
@@ -27171,7 +27147,7 @@
         </p:nvSpPr>
         <p:spPr>
           <a:xfrm>
-            <a:off x="508000" y="304800"/>
+            <a:off x="508000" y="330200"/>
             <a:ext cx="8140700" cy="203200"/>
           </a:xfrm>
           <a:prstGeom prst="rect">
@@ -27197,7 +27173,7 @@
                 </a:solidFill>
                 <a:latin typeface="Calibri"/>
               </a:rPr>
-              <a:t>ЦЕНОВОЕ ПОЗИЦИОНИРОВАНИЕ  ·  СЕБЕСТОИМОСТЬ ОМУ</a:t>
+              <a:t>ЦЕНОВОЕ ПОЗИЦИОНИРОВАНИЕ  ·  ЭКОНОМИКА ОМУ</a:t>
             </a:r>
           </a:p>
         </p:txBody>
@@ -27249,7 +27225,7 @@
         </p:nvSpPr>
         <p:spPr>
           <a:xfrm>
-            <a:off x="508000" y="939800"/>
+            <a:off x="508000" y="927100"/>
             <a:ext cx="8229600" cy="228600"/>
           </a:xfrm>
           <a:prstGeom prst="rect">
@@ -27280,16 +27256,52 @@
           </a:p>
         </p:txBody>
       </p:sp>
-      <p:sp>
-        <p:nvSpPr>
-          <p:cNvPr id="5" name="Rounded Rectangle 4"/>
-          <p:cNvSpPr/>
-          <p:nvPr/>
-        </p:nvSpPr>
-        <p:spPr>
-          <a:xfrm>
-            <a:off x="508000" y="1320800"/>
-            <a:ext cx="4191000" cy="2514600"/>
+      <p:cxnSp>
+        <p:nvCxnSpPr>
+          <p:cNvPr id="5" name="Connector 4"/>
+          <p:cNvCxnSpPr/>
+          <p:nvPr/>
+        </p:nvCxnSpPr>
+        <p:spPr>
+          <a:xfrm>
+            <a:off x="508000" y="1231900"/>
+            <a:ext cx="8140700" cy="0"/>
+          </a:xfrm>
+          <a:prstGeom prst="line">
+            <a:avLst/>
+          </a:prstGeom>
+          <a:ln w="9525">
+            <a:solidFill>
+              <a:srgbClr val="DCE3EB"/>
+            </a:solidFill>
+          </a:ln>
+          <a:effectLst/>
+        </p:spPr>
+        <p:style>
+          <a:lnRef idx="2">
+            <a:schemeClr val="accent1"/>
+          </a:lnRef>
+          <a:fillRef idx="0">
+            <a:schemeClr val="accent1"/>
+          </a:fillRef>
+          <a:effectRef idx="1">
+            <a:schemeClr val="accent1"/>
+          </a:effectRef>
+          <a:fontRef idx="minor">
+            <a:schemeClr val="tx1"/>
+          </a:fontRef>
+        </p:style>
+      </p:cxnSp>
+      <p:sp>
+        <p:nvSpPr>
+          <p:cNvPr id="6" name="Rounded Rectangle 5"/>
+          <p:cNvSpPr/>
+          <p:nvPr/>
+        </p:nvSpPr>
+        <p:spPr>
+          <a:xfrm>
+            <a:off x="508000" y="1346200"/>
+            <a:ext cx="2946400" cy="2362200"/>
           </a:xfrm>
           <a:prstGeom prst="roundRect">
             <a:avLst>
@@ -27336,14 +27348,14 @@
       </p:sp>
       <p:sp>
         <p:nvSpPr>
-          <p:cNvPr id="6" name="TextBox 5"/>
+          <p:cNvPr id="7" name="TextBox 6"/>
           <p:cNvSpPr txBox="1"/>
           <p:nvPr/>
         </p:nvSpPr>
         <p:spPr>
           <a:xfrm>
-            <a:off x="685800" y="1447800"/>
-            <a:ext cx="3810000" cy="203200"/>
+            <a:off x="685800" y="1460500"/>
+            <a:ext cx="2540000" cy="177800"/>
           </a:xfrm>
           <a:prstGeom prst="rect">
             <a:avLst/>
@@ -27373,24 +27385,6 @@
           </a:p>
         </p:txBody>
       </p:sp>
-      <p:graphicFrame>
-        <p:nvGraphicFramePr>
-          <p:cNvPr id="7" name="Chart 6"/>
-          <p:cNvGraphicFramePr>
-            <a:graphicFrameLocks noGrp="1"/>
-          </p:cNvGraphicFramePr>
-          <p:nvPr/>
-        </p:nvGraphicFramePr>
-        <p:xfrm>
-          <a:off x="584200" y="1701800"/>
-          <a:ext cx="4038600" cy="1854200"/>
-        </p:xfrm>
-        <a:graphic>
-          <a:graphicData uri="http://schemas.openxmlformats.org/drawingml/2006/chart">
-            <c:chart xmlns:c="http://schemas.openxmlformats.org/drawingml/2006/chart" r:id="rId2"/>
-          </a:graphicData>
-        </a:graphic>
-      </p:graphicFrame>
       <p:sp>
         <p:nvSpPr>
           <p:cNvPr id="8" name="Rounded Rectangle 7"/>
@@ -27399,8 +27393,703 @@
         </p:nvSpPr>
         <p:spPr>
           <a:xfrm>
-            <a:off x="4826000" y="1320800"/>
-            <a:ext cx="3810000" cy="2514600"/>
+            <a:off x="787400" y="2865361"/>
+            <a:ext cx="533400" cy="563638"/>
+          </a:xfrm>
+          <a:prstGeom prst="roundRect">
+            <a:avLst>
+              <a:gd name="adj" fmla="val 4000"/>
+            </a:avLst>
+          </a:prstGeom>
+          <a:solidFill>
+            <a:srgbClr val="5B8C6E"/>
+          </a:solidFill>
+          <a:ln>
+            <a:noFill/>
+          </a:ln>
+          <a:effectLst/>
+        </p:spPr>
+        <p:style>
+          <a:lnRef idx="1">
+            <a:schemeClr val="accent1"/>
+          </a:lnRef>
+          <a:fillRef idx="3">
+            <a:schemeClr val="accent1"/>
+          </a:fillRef>
+          <a:effectRef idx="2">
+            <a:schemeClr val="accent1"/>
+          </a:effectRef>
+          <a:fontRef idx="minor">
+            <a:schemeClr val="lt1"/>
+          </a:fontRef>
+        </p:style>
+        <p:txBody>
+          <a:bodyPr rtlCol="0" anchor="ctr"/>
+          <a:lstStyle/>
+          <a:p>
+            <a:pPr algn="ctr"/>
+          </a:p>
+        </p:txBody>
+      </p:sp>
+      <p:sp>
+        <p:nvSpPr>
+          <p:cNvPr id="9" name="TextBox 8"/>
+          <p:cNvSpPr txBox="1"/>
+          <p:nvPr/>
+        </p:nvSpPr>
+        <p:spPr>
+          <a:xfrm>
+            <a:off x="711200" y="2662161"/>
+            <a:ext cx="685800" cy="177800"/>
+          </a:xfrm>
+          <a:prstGeom prst="rect">
+            <a:avLst/>
+          </a:prstGeom>
+          <a:noFill/>
+        </p:spPr>
+        <p:txBody>
+          <a:bodyPr wrap="square" anchor="t" lIns="0" rIns="0" tIns="0" bIns="0">
+            <a:spAutoFit/>
+          </a:bodyPr>
+          <a:lstStyle/>
+          <a:p>
+            <a:pPr algn="ctr">
+              <a:spcBef>
+                <a:spcPts val="0"/>
+              </a:spcBef>
+            </a:pPr>
+            <a:r>
+              <a:rPr sz="950" b="1">
+                <a:solidFill>
+                  <a:srgbClr val="5B8C6E"/>
+                </a:solidFill>
+                <a:latin typeface="Calibri"/>
+              </a:rPr>
+              <a:t>$233</a:t>
+            </a:r>
+          </a:p>
+        </p:txBody>
+      </p:sp>
+      <p:sp>
+        <p:nvSpPr>
+          <p:cNvPr id="10" name="TextBox 9"/>
+          <p:cNvSpPr txBox="1"/>
+          <p:nvPr/>
+        </p:nvSpPr>
+        <p:spPr>
+          <a:xfrm>
+            <a:off x="711200" y="3467100"/>
+            <a:ext cx="685800" cy="152400"/>
+          </a:xfrm>
+          <a:prstGeom prst="rect">
+            <a:avLst/>
+          </a:prstGeom>
+          <a:noFill/>
+        </p:spPr>
+        <p:txBody>
+          <a:bodyPr wrap="square" anchor="t" lIns="0" rIns="0" tIns="0" bIns="0">
+            <a:spAutoFit/>
+          </a:bodyPr>
+          <a:lstStyle/>
+          <a:p>
+            <a:pPr algn="ctr">
+              <a:spcBef>
+                <a:spcPts val="0"/>
+              </a:spcBef>
+            </a:pPr>
+            <a:r>
+              <a:rPr sz="780" b="0">
+                <a:solidFill>
+                  <a:srgbClr val="6B7A8D"/>
+                </a:solidFill>
+                <a:latin typeface="Calibri"/>
+              </a:rPr>
+              <a:t>Себест.</a:t>
+            </a:r>
+          </a:p>
+        </p:txBody>
+      </p:sp>
+      <p:sp>
+        <p:nvSpPr>
+          <p:cNvPr id="11" name="Rounded Rectangle 10"/>
+          <p:cNvSpPr/>
+          <p:nvPr/>
+        </p:nvSpPr>
+        <p:spPr>
+          <a:xfrm>
+            <a:off x="1524000" y="2340428"/>
+            <a:ext cx="533400" cy="1088571"/>
+          </a:xfrm>
+          <a:prstGeom prst="roundRect">
+            <a:avLst>
+              <a:gd name="adj" fmla="val 4000"/>
+            </a:avLst>
+          </a:prstGeom>
+          <a:solidFill>
+            <a:srgbClr val="2F6690"/>
+          </a:solidFill>
+          <a:ln>
+            <a:noFill/>
+          </a:ln>
+          <a:effectLst/>
+        </p:spPr>
+        <p:style>
+          <a:lnRef idx="1">
+            <a:schemeClr val="accent1"/>
+          </a:lnRef>
+          <a:fillRef idx="3">
+            <a:schemeClr val="accent1"/>
+          </a:fillRef>
+          <a:effectRef idx="2">
+            <a:schemeClr val="accent1"/>
+          </a:effectRef>
+          <a:fontRef idx="minor">
+            <a:schemeClr val="lt1"/>
+          </a:fontRef>
+        </p:style>
+        <p:txBody>
+          <a:bodyPr rtlCol="0" anchor="ctr"/>
+          <a:lstStyle/>
+          <a:p>
+            <a:pPr algn="ctr"/>
+          </a:p>
+        </p:txBody>
+      </p:sp>
+      <p:sp>
+        <p:nvSpPr>
+          <p:cNvPr id="12" name="TextBox 11"/>
+          <p:cNvSpPr txBox="1"/>
+          <p:nvPr/>
+        </p:nvSpPr>
+        <p:spPr>
+          <a:xfrm>
+            <a:off x="1447800" y="2137228"/>
+            <a:ext cx="685800" cy="177800"/>
+          </a:xfrm>
+          <a:prstGeom prst="rect">
+            <a:avLst/>
+          </a:prstGeom>
+          <a:noFill/>
+        </p:spPr>
+        <p:txBody>
+          <a:bodyPr wrap="square" anchor="t" lIns="0" rIns="0" tIns="0" bIns="0">
+            <a:spAutoFit/>
+          </a:bodyPr>
+          <a:lstStyle/>
+          <a:p>
+            <a:pPr algn="ctr">
+              <a:spcBef>
+                <a:spcPts val="0"/>
+              </a:spcBef>
+            </a:pPr>
+            <a:r>
+              <a:rPr sz="950" b="1">
+                <a:solidFill>
+                  <a:srgbClr val="2F6690"/>
+                </a:solidFill>
+                <a:latin typeface="Calibri"/>
+              </a:rPr>
+              <a:t>$450</a:t>
+            </a:r>
+          </a:p>
+        </p:txBody>
+      </p:sp>
+      <p:sp>
+        <p:nvSpPr>
+          <p:cNvPr id="13" name="TextBox 12"/>
+          <p:cNvSpPr txBox="1"/>
+          <p:nvPr/>
+        </p:nvSpPr>
+        <p:spPr>
+          <a:xfrm>
+            <a:off x="1447800" y="3467100"/>
+            <a:ext cx="685800" cy="152400"/>
+          </a:xfrm>
+          <a:prstGeom prst="rect">
+            <a:avLst/>
+          </a:prstGeom>
+          <a:noFill/>
+        </p:spPr>
+        <p:txBody>
+          <a:bodyPr wrap="square" anchor="t" lIns="0" rIns="0" tIns="0" bIns="0">
+            <a:spAutoFit/>
+          </a:bodyPr>
+          <a:lstStyle/>
+          <a:p>
+            <a:pPr algn="ctr">
+              <a:spcBef>
+                <a:spcPts val="0"/>
+              </a:spcBef>
+            </a:pPr>
+            <a:r>
+              <a:rPr sz="780" b="0">
+                <a:solidFill>
+                  <a:srgbClr val="6B7A8D"/>
+                </a:solidFill>
+                <a:latin typeface="Calibri"/>
+              </a:rPr>
+              <a:t>Цена</a:t>
+            </a:r>
+          </a:p>
+        </p:txBody>
+      </p:sp>
+      <p:sp>
+        <p:nvSpPr>
+          <p:cNvPr id="14" name="Rounded Rectangle 13"/>
+          <p:cNvSpPr/>
+          <p:nvPr/>
+        </p:nvSpPr>
+        <p:spPr>
+          <a:xfrm>
+            <a:off x="2260600" y="1905000"/>
+            <a:ext cx="533400" cy="1524000"/>
+          </a:xfrm>
+          <a:prstGeom prst="roundRect">
+            <a:avLst>
+              <a:gd name="adj" fmla="val 4000"/>
+            </a:avLst>
+          </a:prstGeom>
+          <a:solidFill>
+            <a:srgbClr val="13294B"/>
+          </a:solidFill>
+          <a:ln>
+            <a:noFill/>
+          </a:ln>
+          <a:effectLst/>
+        </p:spPr>
+        <p:style>
+          <a:lnRef idx="1">
+            <a:schemeClr val="accent1"/>
+          </a:lnRef>
+          <a:fillRef idx="3">
+            <a:schemeClr val="accent1"/>
+          </a:fillRef>
+          <a:effectRef idx="2">
+            <a:schemeClr val="accent1"/>
+          </a:effectRef>
+          <a:fontRef idx="minor">
+            <a:schemeClr val="lt1"/>
+          </a:fontRef>
+        </p:style>
+        <p:txBody>
+          <a:bodyPr rtlCol="0" anchor="ctr"/>
+          <a:lstStyle/>
+          <a:p>
+            <a:pPr algn="ctr"/>
+          </a:p>
+        </p:txBody>
+      </p:sp>
+      <p:sp>
+        <p:nvSpPr>
+          <p:cNvPr id="15" name="TextBox 14"/>
+          <p:cNvSpPr txBox="1"/>
+          <p:nvPr/>
+        </p:nvSpPr>
+        <p:spPr>
+          <a:xfrm>
+            <a:off x="2184400" y="1701800"/>
+            <a:ext cx="685800" cy="177800"/>
+          </a:xfrm>
+          <a:prstGeom prst="rect">
+            <a:avLst/>
+          </a:prstGeom>
+          <a:noFill/>
+        </p:spPr>
+        <p:txBody>
+          <a:bodyPr wrap="square" anchor="t" lIns="0" rIns="0" tIns="0" bIns="0">
+            <a:spAutoFit/>
+          </a:bodyPr>
+          <a:lstStyle/>
+          <a:p>
+            <a:pPr algn="ctr">
+              <a:spcBef>
+                <a:spcPts val="0"/>
+              </a:spcBef>
+            </a:pPr>
+            <a:r>
+              <a:rPr sz="950" b="1">
+                <a:solidFill>
+                  <a:srgbClr val="13294B"/>
+                </a:solidFill>
+                <a:latin typeface="Calibri"/>
+              </a:rPr>
+              <a:t>$630</a:t>
+            </a:r>
+          </a:p>
+        </p:txBody>
+      </p:sp>
+      <p:sp>
+        <p:nvSpPr>
+          <p:cNvPr id="16" name="TextBox 15"/>
+          <p:cNvSpPr txBox="1"/>
+          <p:nvPr/>
+        </p:nvSpPr>
+        <p:spPr>
+          <a:xfrm>
+            <a:off x="2184400" y="3467100"/>
+            <a:ext cx="685800" cy="152400"/>
+          </a:xfrm>
+          <a:prstGeom prst="rect">
+            <a:avLst/>
+          </a:prstGeom>
+          <a:noFill/>
+        </p:spPr>
+        <p:txBody>
+          <a:bodyPr wrap="square" anchor="t" lIns="0" rIns="0" tIns="0" bIns="0">
+            <a:spAutoFit/>
+          </a:bodyPr>
+          <a:lstStyle/>
+          <a:p>
+            <a:pPr algn="ctr">
+              <a:spcBef>
+                <a:spcPts val="0"/>
+              </a:spcBef>
+            </a:pPr>
+            <a:r>
+              <a:rPr sz="780" b="0">
+                <a:solidFill>
+                  <a:srgbClr val="6B7A8D"/>
+                </a:solidFill>
+                <a:latin typeface="Calibri"/>
+              </a:rPr>
+              <a:t>Импорт</a:t>
+            </a:r>
+          </a:p>
+        </p:txBody>
+      </p:sp>
+      <p:cxnSp>
+        <p:nvCxnSpPr>
+          <p:cNvPr id="17" name="Connector 16"/>
+          <p:cNvCxnSpPr/>
+          <p:nvPr/>
+        </p:nvCxnSpPr>
+        <p:spPr>
+          <a:xfrm>
+            <a:off x="685800" y="3429000"/>
+            <a:ext cx="2540000" cy="0"/>
+          </a:xfrm>
+          <a:prstGeom prst="line">
+            <a:avLst/>
+          </a:prstGeom>
+          <a:ln w="9525">
+            <a:solidFill>
+              <a:srgbClr val="DCE3EB"/>
+            </a:solidFill>
+          </a:ln>
+          <a:effectLst/>
+        </p:spPr>
+        <p:style>
+          <a:lnRef idx="2">
+            <a:schemeClr val="accent1"/>
+          </a:lnRef>
+          <a:fillRef idx="0">
+            <a:schemeClr val="accent1"/>
+          </a:fillRef>
+          <a:effectRef idx="1">
+            <a:schemeClr val="accent1"/>
+          </a:effectRef>
+          <a:fontRef idx="minor">
+            <a:schemeClr val="tx1"/>
+          </a:fontRef>
+        </p:style>
+      </p:cxnSp>
+      <p:sp>
+        <p:nvSpPr>
+          <p:cNvPr id="18" name="Rounded Rectangle 17"/>
+          <p:cNvSpPr/>
+          <p:nvPr/>
+        </p:nvSpPr>
+        <p:spPr>
+          <a:xfrm>
+            <a:off x="3556000" y="1346200"/>
+            <a:ext cx="1905000" cy="2362200"/>
+          </a:xfrm>
+          <a:prstGeom prst="roundRect">
+            <a:avLst>
+              <a:gd name="adj" fmla="val 5000"/>
+            </a:avLst>
+          </a:prstGeom>
+          <a:solidFill>
+            <a:srgbClr val="13294B"/>
+          </a:solidFill>
+          <a:ln>
+            <a:noFill/>
+          </a:ln>
+          <a:effectLst>
+            <a:outerShdw blurRad="101600" dist="25400" dir="5400000" algn="bl" rotWithShape="0">
+              <a:srgbClr val="000000">
+                <a:alpha val="10000"/>
+              </a:srgbClr>
+            </a:outerShdw>
+          </a:effectLst>
+        </p:spPr>
+        <p:style>
+          <a:lnRef idx="1">
+            <a:schemeClr val="accent1"/>
+          </a:lnRef>
+          <a:fillRef idx="3">
+            <a:schemeClr val="accent1"/>
+          </a:fillRef>
+          <a:effectRef idx="2">
+            <a:schemeClr val="accent1"/>
+          </a:effectRef>
+          <a:fontRef idx="minor">
+            <a:schemeClr val="lt1"/>
+          </a:fontRef>
+        </p:style>
+        <p:txBody>
+          <a:bodyPr rtlCol="0" anchor="ctr"/>
+          <a:lstStyle/>
+          <a:p>
+            <a:pPr algn="ctr"/>
+          </a:p>
+        </p:txBody>
+      </p:sp>
+      <p:sp>
+        <p:nvSpPr>
+          <p:cNvPr id="19" name="TextBox 18"/>
+          <p:cNvSpPr txBox="1"/>
+          <p:nvPr/>
+        </p:nvSpPr>
+        <p:spPr>
+          <a:xfrm>
+            <a:off x="3708400" y="1651000"/>
+            <a:ext cx="1600200" cy="431800"/>
+          </a:xfrm>
+          <a:prstGeom prst="rect">
+            <a:avLst/>
+          </a:prstGeom>
+          <a:noFill/>
+        </p:spPr>
+        <p:txBody>
+          <a:bodyPr wrap="square" anchor="t" lIns="0" rIns="0" tIns="0" bIns="0">
+            <a:spAutoFit/>
+          </a:bodyPr>
+          <a:lstStyle/>
+          <a:p>
+            <a:pPr algn="l">
+              <a:spcBef>
+                <a:spcPts val="0"/>
+              </a:spcBef>
+            </a:pPr>
+            <a:r>
+              <a:rPr sz="3000" b="1">
+                <a:solidFill>
+                  <a:srgbClr val="E0A46A"/>
+                </a:solidFill>
+                <a:latin typeface="Arial"/>
+              </a:rPr>
+              <a:t>≈48%</a:t>
+            </a:r>
+          </a:p>
+        </p:txBody>
+      </p:sp>
+      <p:sp>
+        <p:nvSpPr>
+          <p:cNvPr id="20" name="TextBox 19"/>
+          <p:cNvSpPr txBox="1"/>
+          <p:nvPr/>
+        </p:nvSpPr>
+        <p:spPr>
+          <a:xfrm>
+            <a:off x="3721100" y="2108200"/>
+            <a:ext cx="1600200" cy="177800"/>
+          </a:xfrm>
+          <a:prstGeom prst="rect">
+            <a:avLst/>
+          </a:prstGeom>
+          <a:noFill/>
+        </p:spPr>
+        <p:txBody>
+          <a:bodyPr wrap="square" anchor="t" lIns="0" rIns="0" tIns="0" bIns="0">
+            <a:spAutoFit/>
+          </a:bodyPr>
+          <a:lstStyle/>
+          <a:p>
+            <a:pPr algn="l">
+              <a:spcBef>
+                <a:spcPts val="0"/>
+              </a:spcBef>
+            </a:pPr>
+            <a:r>
+              <a:rPr sz="1000" b="1">
+                <a:solidFill>
+                  <a:srgbClr val="FFFFFF"/>
+                </a:solidFill>
+                <a:latin typeface="Calibri"/>
+              </a:rPr>
+              <a:t>валовая маржа</a:t>
+            </a:r>
+          </a:p>
+        </p:txBody>
+      </p:sp>
+      <p:sp>
+        <p:nvSpPr>
+          <p:cNvPr id="21" name="TextBox 20"/>
+          <p:cNvSpPr txBox="1"/>
+          <p:nvPr/>
+        </p:nvSpPr>
+        <p:spPr>
+          <a:xfrm>
+            <a:off x="3721100" y="2311400"/>
+            <a:ext cx="1600200" cy="152400"/>
+          </a:xfrm>
+          <a:prstGeom prst="rect">
+            <a:avLst/>
+          </a:prstGeom>
+          <a:noFill/>
+        </p:spPr>
+        <p:txBody>
+          <a:bodyPr wrap="square" anchor="t" lIns="0" rIns="0" tIns="0" bIns="0">
+            <a:spAutoFit/>
+          </a:bodyPr>
+          <a:lstStyle/>
+          <a:p>
+            <a:pPr algn="l">
+              <a:spcBef>
+                <a:spcPts val="0"/>
+              </a:spcBef>
+            </a:pPr>
+            <a:r>
+              <a:rPr sz="850" b="0">
+                <a:solidFill>
+                  <a:srgbClr val="AEC8DE"/>
+                </a:solidFill>
+                <a:latin typeface="Calibri"/>
+              </a:rPr>
+              <a:t>$217 на тонну ОМУ</a:t>
+            </a:r>
+          </a:p>
+        </p:txBody>
+      </p:sp>
+      <p:cxnSp>
+        <p:nvCxnSpPr>
+          <p:cNvPr id="22" name="Connector 21"/>
+          <p:cNvCxnSpPr/>
+          <p:nvPr/>
+        </p:nvCxnSpPr>
+        <p:spPr>
+          <a:xfrm>
+            <a:off x="3721100" y="2641600"/>
+            <a:ext cx="1498600" cy="0"/>
+          </a:xfrm>
+          <a:prstGeom prst="line">
+            <a:avLst/>
+          </a:prstGeom>
+          <a:ln w="9525">
+            <a:solidFill>
+              <a:srgbClr val="355274"/>
+            </a:solidFill>
+          </a:ln>
+          <a:effectLst/>
+        </p:spPr>
+        <p:style>
+          <a:lnRef idx="2">
+            <a:schemeClr val="accent1"/>
+          </a:lnRef>
+          <a:fillRef idx="0">
+            <a:schemeClr val="accent1"/>
+          </a:fillRef>
+          <a:effectRef idx="1">
+            <a:schemeClr val="accent1"/>
+          </a:effectRef>
+          <a:fontRef idx="minor">
+            <a:schemeClr val="tx1"/>
+          </a:fontRef>
+        </p:style>
+      </p:cxnSp>
+      <p:sp>
+        <p:nvSpPr>
+          <p:cNvPr id="23" name="TextBox 22"/>
+          <p:cNvSpPr txBox="1"/>
+          <p:nvPr/>
+        </p:nvSpPr>
+        <p:spPr>
+          <a:xfrm>
+            <a:off x="3708400" y="2794000"/>
+            <a:ext cx="1600200" cy="330200"/>
+          </a:xfrm>
+          <a:prstGeom prst="rect">
+            <a:avLst/>
+          </a:prstGeom>
+          <a:noFill/>
+        </p:spPr>
+        <p:txBody>
+          <a:bodyPr wrap="square" anchor="t" lIns="0" rIns="0" tIns="0" bIns="0">
+            <a:spAutoFit/>
+          </a:bodyPr>
+          <a:lstStyle/>
+          <a:p>
+            <a:pPr algn="l">
+              <a:spcBef>
+                <a:spcPts val="0"/>
+              </a:spcBef>
+            </a:pPr>
+            <a:r>
+              <a:rPr sz="2200" b="1">
+                <a:solidFill>
+                  <a:srgbClr val="E0A46A"/>
+                </a:solidFill>
+                <a:latin typeface="Arial"/>
+              </a:rPr>
+              <a:t>−29%</a:t>
+            </a:r>
+          </a:p>
+        </p:txBody>
+      </p:sp>
+      <p:sp>
+        <p:nvSpPr>
+          <p:cNvPr id="24" name="TextBox 23"/>
+          <p:cNvSpPr txBox="1"/>
+          <p:nvPr/>
+        </p:nvSpPr>
+        <p:spPr>
+          <a:xfrm>
+            <a:off x="3721100" y="3175000"/>
+            <a:ext cx="1600200" cy="304800"/>
+          </a:xfrm>
+          <a:prstGeom prst="rect">
+            <a:avLst/>
+          </a:prstGeom>
+          <a:noFill/>
+        </p:spPr>
+        <p:txBody>
+          <a:bodyPr wrap="square" anchor="t" lIns="0" rIns="0" tIns="0" bIns="0">
+            <a:spAutoFit/>
+          </a:bodyPr>
+          <a:lstStyle/>
+          <a:p>
+            <a:pPr algn="l">
+              <a:lnSpc>
+                <a:spcPct val="100000"/>
+              </a:lnSpc>
+              <a:spcBef>
+                <a:spcPts val="0"/>
+              </a:spcBef>
+            </a:pPr>
+            <a:r>
+              <a:rPr sz="850" b="0">
+                <a:solidFill>
+                  <a:srgbClr val="AEC8DE"/>
+                </a:solidFill>
+                <a:latin typeface="Calibri"/>
+              </a:rPr>
+              <a:t>к цене импортного
+комплексного аналога</a:t>
+            </a:r>
+          </a:p>
+        </p:txBody>
+      </p:sp>
+      <p:sp>
+        <p:nvSpPr>
+          <p:cNvPr id="25" name="Rounded Rectangle 24"/>
+          <p:cNvSpPr/>
+          <p:nvPr/>
+        </p:nvSpPr>
+        <p:spPr>
+          <a:xfrm>
+            <a:off x="5588000" y="1346200"/>
+            <a:ext cx="3048000" cy="2362200"/>
           </a:xfrm>
           <a:prstGeom prst="roundRect">
             <a:avLst>
@@ -27447,14 +28136,14 @@
       </p:sp>
       <p:sp>
         <p:nvSpPr>
-          <p:cNvPr id="9" name="TextBox 8"/>
+          <p:cNvPr id="26" name="TextBox 25"/>
           <p:cNvSpPr txBox="1"/>
           <p:nvPr/>
         </p:nvSpPr>
         <p:spPr>
           <a:xfrm>
-            <a:off x="5003800" y="1422400"/>
-            <a:ext cx="3556000" cy="177800"/>
+            <a:off x="5740400" y="1447800"/>
+            <a:ext cx="2794000" cy="152400"/>
           </a:xfrm>
           <a:prstGeom prst="rect">
             <a:avLst/>
@@ -27473,7 +28162,7 @@
               </a:spcBef>
             </a:pPr>
             <a:r>
-              <a:rPr sz="860" b="1" spc="60">
+              <a:rPr sz="840" b="1" spc="50">
                 <a:solidFill>
                   <a:srgbClr val="6B7A8D"/>
                 </a:solidFill>
@@ -27486,15 +28175,15 @@
       </p:sp>
       <p:graphicFrame>
         <p:nvGraphicFramePr>
-          <p:cNvPr id="10" name="Table 9"/>
+          <p:cNvPr id="27" name="Table 26"/>
           <p:cNvGraphicFramePr>
             <a:graphicFrameLocks noGrp="1"/>
           </p:cNvGraphicFramePr>
           <p:nvPr/>
         </p:nvGraphicFramePr>
         <p:xfrm>
-          <a:off x="4978400" y="1651000"/>
-          <a:ext cx="3505200" cy="1905000"/>
+          <a:off x="5715000" y="1676400"/>
+          <a:ext cx="2794000" cy="1841500"/>
         </p:xfrm>
         <a:graphic>
           <a:graphicData uri="http://schemas.openxmlformats.org/drawingml/2006/table">
@@ -27503,12 +28192,12 @@
                 <a:tableStyleId>{2D5ABB26-0587-4C30-8999-92F81FD0307C}</a:tableStyleId>
               </a:tblPr>
               <a:tblGrid>
-                <a:gridCol w="1320800"/>
-                <a:gridCol w="787400"/>
-                <a:gridCol w="711200"/>
+                <a:gridCol w="1168400"/>
                 <a:gridCol w="685800"/>
+                <a:gridCol w="508000"/>
+                <a:gridCol w="431800"/>
               </a:tblGrid>
-              <a:tr h="381000">
+              <a:tr h="368300">
                 <a:tc>
                   <a:txBody>
                     <a:bodyPr/>
@@ -27516,7 +28205,7 @@
                     <a:p>
                       <a:pPr algn="l"/>
                       <a:r>
-                        <a:rPr sz="850" b="1">
+                        <a:rPr sz="830" b="1">
                           <a:solidFill>
                             <a:srgbClr val="FFFFFF"/>
                           </a:solidFill>
@@ -27526,7 +28215,7 @@
                       </a:r>
                     </a:p>
                   </a:txBody>
-                  <a:tcPr marL="63500" marR="38100" marT="12700" marB="12700" anchor="ctr">
+                  <a:tcPr marL="50800" marR="38100" marT="0" marB="0" anchor="ctr">
                     <a:solidFill>
                       <a:srgbClr val="13294B"/>
                     </a:solidFill>
@@ -27544,7 +28233,7 @@
                     <a:p>
                       <a:pPr algn="l"/>
                       <a:r>
-                        <a:rPr sz="850" b="1">
+                        <a:rPr sz="830" b="1">
                           <a:solidFill>
                             <a:srgbClr val="FFFFFF"/>
                           </a:solidFill>
@@ -27554,7 +28243,7 @@
                       </a:r>
                     </a:p>
                   </a:txBody>
-                  <a:tcPr marL="63500" marR="38100" marT="12700" marB="12700" anchor="ctr">
+                  <a:tcPr marL="50800" marR="38100" marT="0" marB="0" anchor="ctr">
                     <a:solidFill>
                       <a:srgbClr val="13294B"/>
                     </a:solidFill>
@@ -27572,7 +28261,7 @@
                     <a:p>
                       <a:pPr algn="r"/>
                       <a:r>
-                        <a:rPr sz="850" b="1">
+                        <a:rPr sz="830" b="1">
                           <a:solidFill>
                             <a:srgbClr val="FFFFFF"/>
                           </a:solidFill>
@@ -27582,7 +28271,7 @@
                       </a:r>
                     </a:p>
                   </a:txBody>
-                  <a:tcPr marL="63500" marR="38100" marT="12700" marB="12700" anchor="ctr">
+                  <a:tcPr marL="50800" marR="38100" marT="0" marB="0" anchor="ctr">
                     <a:solidFill>
                       <a:srgbClr val="13294B"/>
                     </a:solidFill>
@@ -27600,7 +28289,7 @@
                     <a:p>
                       <a:pPr algn="r"/>
                       <a:r>
-                        <a:rPr sz="850" b="1">
+                        <a:rPr sz="830" b="1">
                           <a:solidFill>
                             <a:srgbClr val="FFFFFF"/>
                           </a:solidFill>
@@ -27610,7 +28299,7 @@
                       </a:r>
                     </a:p>
                   </a:txBody>
-                  <a:tcPr marL="63500" marR="38100" marT="12700" marB="12700" anchor="ctr">
+                  <a:tcPr marL="50800" marR="38100" marT="0" marB="0" anchor="ctr">
                     <a:solidFill>
                       <a:srgbClr val="13294B"/>
                     </a:solidFill>
@@ -27622,7 +28311,7 @@
                   </a:tcPr>
                 </a:tc>
               </a:tr>
-              <a:tr h="381000">
+              <a:tr h="368300">
                 <a:tc>
                   <a:txBody>
                     <a:bodyPr/>
@@ -27630,7 +28319,7 @@
                     <a:p>
                       <a:pPr algn="l"/>
                       <a:r>
-                        <a:rPr sz="860" b="1">
+                        <a:rPr sz="840" b="1">
                           <a:solidFill>
                             <a:srgbClr val="2A3746"/>
                           </a:solidFill>
@@ -27640,7 +28329,7 @@
                       </a:r>
                     </a:p>
                   </a:txBody>
-                  <a:tcPr marL="63500" marR="38100" marT="12700" marB="12700" anchor="ctr">
+                  <a:tcPr marL="50800" marR="38100" marT="0" marB="0" anchor="ctr">
                     <a:solidFill>
                       <a:srgbClr val="FFFFFF"/>
                     </a:solidFill>
@@ -27658,7 +28347,7 @@
                     <a:p>
                       <a:pPr algn="l"/>
                       <a:r>
-                        <a:rPr sz="860" b="0">
+                        <a:rPr sz="840" b="0">
                           <a:solidFill>
                             <a:srgbClr val="2A3746"/>
                           </a:solidFill>
@@ -27668,7 +28357,7 @@
                       </a:r>
                     </a:p>
                   </a:txBody>
-                  <a:tcPr marL="63500" marR="38100" marT="12700" marB="12700" anchor="ctr">
+                  <a:tcPr marL="50800" marR="38100" marT="0" marB="0" anchor="ctr">
                     <a:solidFill>
                       <a:srgbClr val="FFFFFF"/>
                     </a:solidFill>
@@ -27686,7 +28375,7 @@
                     <a:p>
                       <a:pPr algn="r"/>
                       <a:r>
-                        <a:rPr sz="860" b="1">
+                        <a:rPr sz="840" b="1">
                           <a:solidFill>
                             <a:srgbClr val="2F6690"/>
                           </a:solidFill>
@@ -27696,7 +28385,7 @@
                       </a:r>
                     </a:p>
                   </a:txBody>
-                  <a:tcPr marL="63500" marR="38100" marT="12700" marB="12700" anchor="ctr">
+                  <a:tcPr marL="50800" marR="38100" marT="0" marB="0" anchor="ctr">
                     <a:solidFill>
                       <a:srgbClr val="FFFFFF"/>
                     </a:solidFill>
@@ -27714,7 +28403,7 @@
                     <a:p>
                       <a:pPr algn="r"/>
                       <a:r>
-                        <a:rPr sz="860" b="1">
+                        <a:rPr sz="840" b="1">
                           <a:solidFill>
                             <a:srgbClr val="2F6690"/>
                           </a:solidFill>
@@ -27724,7 +28413,7 @@
                       </a:r>
                     </a:p>
                   </a:txBody>
-                  <a:tcPr marL="63500" marR="38100" marT="12700" marB="12700" anchor="ctr">
+                  <a:tcPr marL="50800" marR="38100" marT="0" marB="0" anchor="ctr">
                     <a:solidFill>
                       <a:srgbClr val="FFFFFF"/>
                     </a:solidFill>
@@ -27736,7 +28425,7 @@
                   </a:tcPr>
                 </a:tc>
               </a:tr>
-              <a:tr h="381000">
+              <a:tr h="368300">
                 <a:tc>
                   <a:txBody>
                     <a:bodyPr/>
@@ -27744,7 +28433,7 @@
                     <a:p>
                       <a:pPr algn="l"/>
                       <a:r>
-                        <a:rPr sz="860" b="1">
+                        <a:rPr sz="840" b="1">
                           <a:solidFill>
                             <a:srgbClr val="2A3746"/>
                           </a:solidFill>
@@ -27754,7 +28443,7 @@
                       </a:r>
                     </a:p>
                   </a:txBody>
-                  <a:tcPr marL="63500" marR="38100" marT="12700" marB="12700" anchor="ctr">
+                  <a:tcPr marL="50800" marR="38100" marT="0" marB="0" anchor="ctr">
                     <a:solidFill>
                       <a:srgbClr val="F4F6F9"/>
                     </a:solidFill>
@@ -27772,7 +28461,7 @@
                     <a:p>
                       <a:pPr algn="l"/>
                       <a:r>
-                        <a:rPr sz="860" b="0">
+                        <a:rPr sz="840" b="0">
                           <a:solidFill>
                             <a:srgbClr val="2A3746"/>
                           </a:solidFill>
@@ -27782,7 +28471,7 @@
                       </a:r>
                     </a:p>
                   </a:txBody>
-                  <a:tcPr marL="63500" marR="38100" marT="12700" marB="12700" anchor="ctr">
+                  <a:tcPr marL="50800" marR="38100" marT="0" marB="0" anchor="ctr">
                     <a:solidFill>
                       <a:srgbClr val="F4F6F9"/>
                     </a:solidFill>
@@ -27800,7 +28489,7 @@
                     <a:p>
                       <a:pPr algn="r"/>
                       <a:r>
-                        <a:rPr sz="860" b="1">
+                        <a:rPr sz="840" b="1">
                           <a:solidFill>
                             <a:srgbClr val="2F6690"/>
                           </a:solidFill>
@@ -27810,7 +28499,7 @@
                       </a:r>
                     </a:p>
                   </a:txBody>
-                  <a:tcPr marL="63500" marR="38100" marT="12700" marB="12700" anchor="ctr">
+                  <a:tcPr marL="50800" marR="38100" marT="0" marB="0" anchor="ctr">
                     <a:solidFill>
                       <a:srgbClr val="F4F6F9"/>
                     </a:solidFill>
@@ -27828,7 +28517,7 @@
                     <a:p>
                       <a:pPr algn="r"/>
                       <a:r>
-                        <a:rPr sz="860" b="1">
+                        <a:rPr sz="840" b="1">
                           <a:solidFill>
                             <a:srgbClr val="2F6690"/>
                           </a:solidFill>
@@ -27838,7 +28527,7 @@
                       </a:r>
                     </a:p>
                   </a:txBody>
-                  <a:tcPr marL="63500" marR="38100" marT="12700" marB="12700" anchor="ctr">
+                  <a:tcPr marL="50800" marR="38100" marT="0" marB="0" anchor="ctr">
                     <a:solidFill>
                       <a:srgbClr val="F4F6F9"/>
                     </a:solidFill>
@@ -27850,7 +28539,7 @@
                   </a:tcPr>
                 </a:tc>
               </a:tr>
-              <a:tr h="381000">
+              <a:tr h="368300">
                 <a:tc>
                   <a:txBody>
                     <a:bodyPr/>
@@ -27858,7 +28547,7 @@
                     <a:p>
                       <a:pPr algn="l"/>
                       <a:r>
-                        <a:rPr sz="860" b="1">
+                        <a:rPr sz="840" b="1">
                           <a:solidFill>
                             <a:srgbClr val="2A3746"/>
                           </a:solidFill>
@@ -27868,7 +28557,7 @@
                       </a:r>
                     </a:p>
                   </a:txBody>
-                  <a:tcPr marL="63500" marR="38100" marT="12700" marB="12700" anchor="ctr">
+                  <a:tcPr marL="50800" marR="38100" marT="0" marB="0" anchor="ctr">
                     <a:solidFill>
                       <a:srgbClr val="FFFFFF"/>
                     </a:solidFill>
@@ -27886,7 +28575,7 @@
                     <a:p>
                       <a:pPr algn="l"/>
                       <a:r>
-                        <a:rPr sz="860" b="0">
+                        <a:rPr sz="840" b="0">
                           <a:solidFill>
                             <a:srgbClr val="2A3746"/>
                           </a:solidFill>
@@ -27896,7 +28585,7 @@
                       </a:r>
                     </a:p>
                   </a:txBody>
-                  <a:tcPr marL="63500" marR="38100" marT="12700" marB="12700" anchor="ctr">
+                  <a:tcPr marL="50800" marR="38100" marT="0" marB="0" anchor="ctr">
                     <a:solidFill>
                       <a:srgbClr val="FFFFFF"/>
                     </a:solidFill>
@@ -27914,7 +28603,7 @@
                     <a:p>
                       <a:pPr algn="r"/>
                       <a:r>
-                        <a:rPr sz="860" b="1">
+                        <a:rPr sz="840" b="1">
                           <a:solidFill>
                             <a:srgbClr val="2F6690"/>
                           </a:solidFill>
@@ -27924,7 +28613,7 @@
                       </a:r>
                     </a:p>
                   </a:txBody>
-                  <a:tcPr marL="63500" marR="38100" marT="12700" marB="12700" anchor="ctr">
+                  <a:tcPr marL="50800" marR="38100" marT="0" marB="0" anchor="ctr">
                     <a:solidFill>
                       <a:srgbClr val="FFFFFF"/>
                     </a:solidFill>
@@ -27942,7 +28631,7 @@
                     <a:p>
                       <a:pPr algn="r"/>
                       <a:r>
-                        <a:rPr sz="860" b="1">
+                        <a:rPr sz="840" b="1">
                           <a:solidFill>
                             <a:srgbClr val="2F6690"/>
                           </a:solidFill>
@@ -27952,7 +28641,7 @@
                       </a:r>
                     </a:p>
                   </a:txBody>
-                  <a:tcPr marL="63500" marR="38100" marT="12700" marB="12700" anchor="ctr">
+                  <a:tcPr marL="50800" marR="38100" marT="0" marB="0" anchor="ctr">
                     <a:solidFill>
                       <a:srgbClr val="FFFFFF"/>
                     </a:solidFill>
@@ -27964,7 +28653,7 @@
                   </a:tcPr>
                 </a:tc>
               </a:tr>
-              <a:tr h="381000">
+              <a:tr h="368300">
                 <a:tc>
                   <a:txBody>
                     <a:bodyPr/>
@@ -27972,7 +28661,7 @@
                     <a:p>
                       <a:pPr algn="l"/>
                       <a:r>
-                        <a:rPr sz="860" b="1">
+                        <a:rPr sz="840" b="1">
                           <a:solidFill>
                             <a:srgbClr val="2A3746"/>
                           </a:solidFill>
@@ -27982,7 +28671,7 @@
                       </a:r>
                     </a:p>
                   </a:txBody>
-                  <a:tcPr marL="63500" marR="38100" marT="12700" marB="12700" anchor="ctr">
+                  <a:tcPr marL="50800" marR="38100" marT="0" marB="0" anchor="ctr">
                     <a:solidFill>
                       <a:srgbClr val="F4F6F9"/>
                     </a:solidFill>
@@ -28000,7 +28689,7 @@
                     <a:p>
                       <a:pPr algn="l"/>
                       <a:r>
-                        <a:rPr sz="860" b="0">
+                        <a:rPr sz="840" b="0">
                           <a:solidFill>
                             <a:srgbClr val="2A3746"/>
                           </a:solidFill>
@@ -28010,7 +28699,7 @@
                       </a:r>
                     </a:p>
                   </a:txBody>
-                  <a:tcPr marL="63500" marR="38100" marT="12700" marB="12700" anchor="ctr">
+                  <a:tcPr marL="50800" marR="38100" marT="0" marB="0" anchor="ctr">
                     <a:solidFill>
                       <a:srgbClr val="F4F6F9"/>
                     </a:solidFill>
@@ -28028,7 +28717,7 @@
                     <a:p>
                       <a:pPr algn="r"/>
                       <a:r>
-                        <a:rPr sz="860" b="1">
+                        <a:rPr sz="840" b="1">
                           <a:solidFill>
                             <a:srgbClr val="2F6690"/>
                           </a:solidFill>
@@ -28038,7 +28727,7 @@
                       </a:r>
                     </a:p>
                   </a:txBody>
-                  <a:tcPr marL="63500" marR="38100" marT="12700" marB="12700" anchor="ctr">
+                  <a:tcPr marL="50800" marR="38100" marT="0" marB="0" anchor="ctr">
                     <a:solidFill>
                       <a:srgbClr val="F4F6F9"/>
                     </a:solidFill>
@@ -28056,7 +28745,7 @@
                     <a:p>
                       <a:pPr algn="r"/>
                       <a:r>
-                        <a:rPr sz="860" b="1">
+                        <a:rPr sz="840" b="1">
                           <a:solidFill>
                             <a:srgbClr val="2F6690"/>
                           </a:solidFill>
@@ -28066,7 +28755,7 @@
                       </a:r>
                     </a:p>
                   </a:txBody>
-                  <a:tcPr marL="63500" marR="38100" marT="12700" marB="12700" anchor="ctr">
+                  <a:tcPr marL="50800" marR="38100" marT="0" marB="0" anchor="ctr">
                     <a:solidFill>
                       <a:srgbClr val="F4F6F9"/>
                     </a:solidFill>
@@ -28084,13 +28773,13 @@
       </p:graphicFrame>
       <p:sp>
         <p:nvSpPr>
-          <p:cNvPr id="11" name="Rounded Rectangle 10"/>
-          <p:cNvSpPr/>
-          <p:nvPr/>
-        </p:nvSpPr>
-        <p:spPr>
-          <a:xfrm>
-            <a:off x="508000" y="3962400"/>
+          <p:cNvPr id="28" name="Rounded Rectangle 27"/>
+          <p:cNvSpPr/>
+          <p:nvPr/>
+        </p:nvSpPr>
+        <p:spPr>
+          <a:xfrm>
+            <a:off x="508000" y="3860800"/>
             <a:ext cx="8128000" cy="558800"/>
           </a:xfrm>
           <a:prstGeom prst="roundRect">
@@ -28130,13 +28819,13 @@
       </p:sp>
       <p:sp>
         <p:nvSpPr>
-          <p:cNvPr id="12" name="TextBox 11"/>
+          <p:cNvPr id="29" name="TextBox 28"/>
           <p:cNvSpPr txBox="1"/>
           <p:nvPr/>
         </p:nvSpPr>
         <p:spPr>
           <a:xfrm>
-            <a:off x="711200" y="3962400"/>
+            <a:off x="711200" y="3860800"/>
             <a:ext cx="7747000" cy="558800"/>
           </a:xfrm>
           <a:prstGeom prst="rect">
@@ -28174,14 +28863,53 @@
                 </a:solidFill>
                 <a:latin typeface="Calibri"/>
               </a:rPr>
-              <a:t>ОМУ дешевле импортных комплексных удобрений (~$630/т) и минеральных аналогов при эффективности питательных веществ 1:3 (ФАО); логистика ≈ $25/т.</a:t>
+              <a:t>ОМУ на ≈ 29% дешевле импортных комплексных удобрений (~$630/т) при эффективности питательных веществ 1:3 (ФАО) и локальном сырье — устойчивая юнит-экономика независимо от глобальных цен.</a:t>
+            </a:r>
+          </a:p>
+        </p:txBody>
+      </p:sp>
+      <p:sp>
+        <p:nvSpPr>
+          <p:cNvPr id="30" name="TextBox 29"/>
+          <p:cNvSpPr txBox="1"/>
+          <p:nvPr/>
+        </p:nvSpPr>
+        <p:spPr>
+          <a:xfrm>
+            <a:off x="508000" y="4572000"/>
+            <a:ext cx="7112000" cy="152400"/>
+          </a:xfrm>
+          <a:prstGeom prst="rect">
+            <a:avLst/>
+          </a:prstGeom>
+          <a:noFill/>
+        </p:spPr>
+        <p:txBody>
+          <a:bodyPr wrap="square" anchor="t" lIns="0" rIns="0" tIns="0" bIns="0">
+            <a:spAutoFit/>
+          </a:bodyPr>
+          <a:lstStyle/>
+          <a:p>
+            <a:pPr algn="l">
+              <a:spcBef>
+                <a:spcPts val="0"/>
+              </a:spcBef>
+            </a:pPr>
+            <a:r>
+              <a:rPr sz="700" b="0">
+                <a:solidFill>
+                  <a:srgbClr val="9AA6B3"/>
+                </a:solidFill>
+                <a:latin typeface="Calibri"/>
+              </a:rPr>
+              <a:t>Источники: маркетинговый анализ проекта, 2026; World Bank, 06.2026; ФАО (эффективность 1:3). Цены — ориентировочные, до подтверждения контрактами.</a:t>
             </a:r>
           </a:p>
         </p:txBody>
       </p:sp>
       <p:cxnSp>
         <p:nvCxnSpPr>
-          <p:cNvPr id="13" name="Connector 12"/>
+          <p:cNvPr id="31" name="Connector 30"/>
           <p:cNvCxnSpPr/>
           <p:nvPr/>
         </p:nvCxnSpPr>
@@ -28217,7 +28945,7 @@
       </p:cxnSp>
       <p:sp>
         <p:nvSpPr>
-          <p:cNvPr id="14" name="TextBox 13"/>
+          <p:cNvPr id="32" name="TextBox 31"/>
           <p:cNvSpPr txBox="1"/>
           <p:nvPr/>
         </p:nvSpPr>
@@ -28265,7 +28993,7 @@
       </p:sp>
       <p:sp>
         <p:nvSpPr>
-          <p:cNvPr id="15" name="TextBox 14"/>
+          <p:cNvPr id="33" name="TextBox 32"/>
           <p:cNvSpPr txBox="1"/>
           <p:nvPr/>
         </p:nvSpPr>
@@ -28297,14 +29025,14 @@
                 </a:solidFill>
                 <a:latin typeface="Calibri"/>
               </a:rPr>
-              <a:t>АНАЛИЗ РЫНКА · ЦЕНЫ И СЕБЕСТОИМОСТЬ</a:t>
-            </a:r>
-          </a:p>
-        </p:txBody>
-      </p:sp>
-      <p:sp>
-        <p:nvSpPr>
-          <p:cNvPr id="16" name="TextBox 15"/>
+              <a:t>АНАЛИЗ РЫНКА · ЦЕНЫ И ЭКОНОМИКА</a:t>
+            </a:r>
+          </a:p>
+        </p:txBody>
+      </p:sp>
+      <p:sp>
+        <p:nvSpPr>
+          <p:cNvPr id="34" name="TextBox 33"/>
           <p:cNvSpPr txBox="1"/>
           <p:nvPr/>
         </p:nvSpPr>
@@ -28337,6 +29065,1514 @@
                 <a:latin typeface="Calibri"/>
               </a:rPr>
               <a:t>18</a:t>
+            </a:r>
+          </a:p>
+        </p:txBody>
+      </p:sp>
+    </p:spTree>
+  </p:cSld>
+  <p:clrMapOvr>
+    <a:masterClrMapping/>
+  </p:clrMapOvr>
+</p:sld>
+</file>
+
+<file path=ppt/slides/slide27.xml><?xml version="1.0" encoding="utf-8"?>
+<p:sld xmlns:a="http://schemas.openxmlformats.org/drawingml/2006/main" xmlns:p="http://schemas.openxmlformats.org/presentationml/2006/main" xmlns:r="http://schemas.openxmlformats.org/officeDocument/2006/relationships">
+  <p:cSld>
+    <p:bg>
+      <p:bgPr>
+        <a:solidFill>
+          <a:srgbClr val="13294B"/>
+        </a:solidFill>
+        <a:effectLst/>
+      </p:bgPr>
+    </p:bg>
+    <p:spTree>
+      <p:nvGrpSpPr>
+        <p:cNvPr id="1" name=""/>
+        <p:cNvGrpSpPr/>
+        <p:nvPr/>
+      </p:nvGrpSpPr>
+      <p:grpSpPr/>
+      <p:sp>
+        <p:nvSpPr>
+          <p:cNvPr id="2" name="TextBox 1"/>
+          <p:cNvSpPr txBox="1"/>
+          <p:nvPr/>
+        </p:nvSpPr>
+        <p:spPr>
+          <a:xfrm>
+            <a:off x="508000" y="330200"/>
+            <a:ext cx="8140700" cy="203200"/>
+          </a:xfrm>
+          <a:prstGeom prst="rect">
+            <a:avLst/>
+          </a:prstGeom>
+          <a:noFill/>
+        </p:spPr>
+        <p:txBody>
+          <a:bodyPr wrap="square" anchor="t" lIns="0" rIns="0" tIns="0" bIns="0">
+            <a:spAutoFit/>
+          </a:bodyPr>
+          <a:lstStyle/>
+          <a:p>
+            <a:pPr algn="l">
+              <a:spcBef>
+                <a:spcPts val="0"/>
+              </a:spcBef>
+            </a:pPr>
+            <a:r>
+              <a:rPr sz="1100" b="1" spc="140">
+                <a:solidFill>
+                  <a:srgbClr val="E0A46A"/>
+                </a:solidFill>
+                <a:latin typeface="Calibri"/>
+              </a:rPr>
+              <a:t>ИНВЕСТИЦИОННЫЙ ТЕЗИС  ·  MARKET → PROJECT</a:t>
+            </a:r>
+          </a:p>
+        </p:txBody>
+      </p:sp>
+      <p:sp>
+        <p:nvSpPr>
+          <p:cNvPr id="3" name="TextBox 2"/>
+          <p:cNvSpPr txBox="1"/>
+          <p:nvPr/>
+        </p:nvSpPr>
+        <p:spPr>
+          <a:xfrm>
+            <a:off x="508000" y="584200"/>
+            <a:ext cx="8229600" cy="355600"/>
+          </a:xfrm>
+          <a:prstGeom prst="rect">
+            <a:avLst/>
+          </a:prstGeom>
+          <a:noFill/>
+        </p:spPr>
+        <p:txBody>
+          <a:bodyPr wrap="square" anchor="t" lIns="0" rIns="0" tIns="0" bIns="0">
+            <a:spAutoFit/>
+          </a:bodyPr>
+          <a:lstStyle/>
+          <a:p>
+            <a:pPr algn="l">
+              <a:spcBef>
+                <a:spcPts val="0"/>
+              </a:spcBef>
+            </a:pPr>
+            <a:r>
+              <a:rPr sz="2100" b="1">
+                <a:solidFill>
+                  <a:srgbClr val="FFFFFF"/>
+                </a:solidFill>
+                <a:latin typeface="Arial"/>
+              </a:rPr>
+              <a:t>Рынок конвертируется в защищённую выручку проекта</a:t>
+            </a:r>
+          </a:p>
+        </p:txBody>
+      </p:sp>
+      <p:sp>
+        <p:nvSpPr>
+          <p:cNvPr id="4" name="TextBox 3"/>
+          <p:cNvSpPr txBox="1"/>
+          <p:nvPr/>
+        </p:nvSpPr>
+        <p:spPr>
+          <a:xfrm>
+            <a:off x="508000" y="927100"/>
+            <a:ext cx="8229600" cy="228600"/>
+          </a:xfrm>
+          <a:prstGeom prst="rect">
+            <a:avLst/>
+          </a:prstGeom>
+          <a:noFill/>
+        </p:spPr>
+        <p:txBody>
+          <a:bodyPr wrap="square" anchor="t" lIns="0" rIns="0" tIns="0" bIns="0">
+            <a:spAutoFit/>
+          </a:bodyPr>
+          <a:lstStyle/>
+          <a:p>
+            <a:pPr algn="l">
+              <a:spcBef>
+                <a:spcPts val="0"/>
+              </a:spcBef>
+            </a:pPr>
+            <a:r>
+              <a:rPr sz="1050" b="0">
+                <a:solidFill>
+                  <a:srgbClr val="AEC8DE"/>
+                </a:solidFill>
+                <a:latin typeface="Calibri"/>
+              </a:rPr>
+              <a:t>Импортозамещение + ценовое преимущество + локальное сырьё = устойчивая маржинальная выручка</a:t>
+            </a:r>
+          </a:p>
+        </p:txBody>
+      </p:sp>
+      <p:cxnSp>
+        <p:nvCxnSpPr>
+          <p:cNvPr id="5" name="Connector 4"/>
+          <p:cNvCxnSpPr/>
+          <p:nvPr/>
+        </p:nvCxnSpPr>
+        <p:spPr>
+          <a:xfrm>
+            <a:off x="508000" y="1231900"/>
+            <a:ext cx="8140700" cy="0"/>
+          </a:xfrm>
+          <a:prstGeom prst="line">
+            <a:avLst/>
+          </a:prstGeom>
+          <a:ln w="9525">
+            <a:solidFill>
+              <a:srgbClr val="2A3D5C"/>
+            </a:solidFill>
+          </a:ln>
+          <a:effectLst/>
+        </p:spPr>
+        <p:style>
+          <a:lnRef idx="2">
+            <a:schemeClr val="accent1"/>
+          </a:lnRef>
+          <a:fillRef idx="0">
+            <a:schemeClr val="accent1"/>
+          </a:fillRef>
+          <a:effectRef idx="1">
+            <a:schemeClr val="accent1"/>
+          </a:effectRef>
+          <a:fontRef idx="minor">
+            <a:schemeClr val="tx1"/>
+          </a:fontRef>
+        </p:style>
+      </p:cxnSp>
+      <p:sp>
+        <p:nvSpPr>
+          <p:cNvPr id="6" name="Rounded Rectangle 5"/>
+          <p:cNvSpPr/>
+          <p:nvPr/>
+        </p:nvSpPr>
+        <p:spPr>
+          <a:xfrm>
+            <a:off x="508000" y="1371600"/>
+            <a:ext cx="1917700" cy="812800"/>
+          </a:xfrm>
+          <a:prstGeom prst="roundRect">
+            <a:avLst>
+              <a:gd name="adj" fmla="val 10000"/>
+            </a:avLst>
+          </a:prstGeom>
+          <a:solidFill>
+            <a:srgbClr val="0C1D38"/>
+          </a:solidFill>
+          <a:ln w="12700">
+            <a:solidFill>
+              <a:srgbClr val="243A59"/>
+            </a:solidFill>
+          </a:ln>
+          <a:effectLst/>
+        </p:spPr>
+        <p:style>
+          <a:lnRef idx="1">
+            <a:schemeClr val="accent1"/>
+          </a:lnRef>
+          <a:fillRef idx="3">
+            <a:schemeClr val="accent1"/>
+          </a:fillRef>
+          <a:effectRef idx="2">
+            <a:schemeClr val="accent1"/>
+          </a:effectRef>
+          <a:fontRef idx="minor">
+            <a:schemeClr val="lt1"/>
+          </a:fontRef>
+        </p:style>
+        <p:txBody>
+          <a:bodyPr rtlCol="0" anchor="ctr"/>
+          <a:lstStyle/>
+          <a:p>
+            <a:pPr algn="ctr"/>
+          </a:p>
+        </p:txBody>
+      </p:sp>
+      <p:sp>
+        <p:nvSpPr>
+          <p:cNvPr id="7" name="Rectangle 6"/>
+          <p:cNvSpPr/>
+          <p:nvPr/>
+        </p:nvSpPr>
+        <p:spPr>
+          <a:xfrm>
+            <a:off x="533400" y="1435100"/>
+            <a:ext cx="38100" cy="685800"/>
+          </a:xfrm>
+          <a:prstGeom prst="rect">
+            <a:avLst/>
+          </a:prstGeom>
+          <a:solidFill>
+            <a:srgbClr val="E0A46A"/>
+          </a:solidFill>
+          <a:ln>
+            <a:noFill/>
+          </a:ln>
+          <a:effectLst/>
+        </p:spPr>
+        <p:style>
+          <a:lnRef idx="1">
+            <a:schemeClr val="accent1"/>
+          </a:lnRef>
+          <a:fillRef idx="3">
+            <a:schemeClr val="accent1"/>
+          </a:fillRef>
+          <a:effectRef idx="2">
+            <a:schemeClr val="accent1"/>
+          </a:effectRef>
+          <a:fontRef idx="minor">
+            <a:schemeClr val="lt1"/>
+          </a:fontRef>
+        </p:style>
+        <p:txBody>
+          <a:bodyPr rtlCol="0" anchor="ctr"/>
+          <a:lstStyle/>
+          <a:p>
+            <a:pPr algn="ctr"/>
+          </a:p>
+        </p:txBody>
+      </p:sp>
+      <p:sp>
+        <p:nvSpPr>
+          <p:cNvPr id="8" name="TextBox 7"/>
+          <p:cNvSpPr txBox="1"/>
+          <p:nvPr/>
+        </p:nvSpPr>
+        <p:spPr>
+          <a:xfrm>
+            <a:off x="685800" y="1447800"/>
+            <a:ext cx="1638300" cy="304800"/>
+          </a:xfrm>
+          <a:prstGeom prst="rect">
+            <a:avLst/>
+          </a:prstGeom>
+          <a:noFill/>
+        </p:spPr>
+        <p:txBody>
+          <a:bodyPr wrap="square" anchor="b" lIns="0" rIns="0" tIns="0" bIns="0">
+            <a:spAutoFit/>
+          </a:bodyPr>
+          <a:lstStyle/>
+          <a:p>
+            <a:pPr algn="l">
+              <a:spcBef>
+                <a:spcPts val="0"/>
+              </a:spcBef>
+            </a:pPr>
+            <a:r>
+              <a:rPr sz="2300" b="1">
+                <a:solidFill>
+                  <a:srgbClr val="E0A46A"/>
+                </a:solidFill>
+                <a:latin typeface="Arial"/>
+              </a:rPr>
+              <a:t>1,3</a:t>
+            </a:r>
+            <a:r>
+              <a:rPr sz="1050" b="1">
+                <a:solidFill>
+                  <a:srgbClr val="AEC8DE"/>
+                </a:solidFill>
+                <a:latin typeface="Calibri"/>
+              </a:rPr>
+              <a:t> млн т</a:t>
+            </a:r>
+          </a:p>
+        </p:txBody>
+      </p:sp>
+      <p:sp>
+        <p:nvSpPr>
+          <p:cNvPr id="9" name="TextBox 8"/>
+          <p:cNvSpPr txBox="1"/>
+          <p:nvPr/>
+        </p:nvSpPr>
+        <p:spPr>
+          <a:xfrm>
+            <a:off x="685800" y="1752600"/>
+            <a:ext cx="1612900" cy="406400"/>
+          </a:xfrm>
+          <a:prstGeom prst="rect">
+            <a:avLst/>
+          </a:prstGeom>
+          <a:noFill/>
+        </p:spPr>
+        <p:txBody>
+          <a:bodyPr wrap="square" anchor="t" lIns="0" rIns="0" tIns="0" bIns="0">
+            <a:spAutoFit/>
+          </a:bodyPr>
+          <a:lstStyle/>
+          <a:p>
+            <a:pPr algn="l">
+              <a:lnSpc>
+                <a:spcPct val="100000"/>
+              </a:lnSpc>
+              <a:spcBef>
+                <a:spcPts val="0"/>
+              </a:spcBef>
+            </a:pPr>
+            <a:r>
+              <a:rPr sz="860" b="0">
+                <a:solidFill>
+                  <a:srgbClr val="AEC8DE"/>
+                </a:solidFill>
+                <a:latin typeface="Calibri"/>
+              </a:rPr>
+              <a:t>ёмкость рынка РК — адресный спрос</a:t>
+            </a:r>
+          </a:p>
+        </p:txBody>
+      </p:sp>
+      <p:sp>
+        <p:nvSpPr>
+          <p:cNvPr id="10" name="Rounded Rectangle 9"/>
+          <p:cNvSpPr/>
+          <p:nvPr/>
+        </p:nvSpPr>
+        <p:spPr>
+          <a:xfrm>
+            <a:off x="2578100" y="1371600"/>
+            <a:ext cx="1917700" cy="812800"/>
+          </a:xfrm>
+          <a:prstGeom prst="roundRect">
+            <a:avLst>
+              <a:gd name="adj" fmla="val 10000"/>
+            </a:avLst>
+          </a:prstGeom>
+          <a:solidFill>
+            <a:srgbClr val="0C1D38"/>
+          </a:solidFill>
+          <a:ln w="12700">
+            <a:solidFill>
+              <a:srgbClr val="243A59"/>
+            </a:solidFill>
+          </a:ln>
+          <a:effectLst/>
+        </p:spPr>
+        <p:style>
+          <a:lnRef idx="1">
+            <a:schemeClr val="accent1"/>
+          </a:lnRef>
+          <a:fillRef idx="3">
+            <a:schemeClr val="accent1"/>
+          </a:fillRef>
+          <a:effectRef idx="2">
+            <a:schemeClr val="accent1"/>
+          </a:effectRef>
+          <a:fontRef idx="minor">
+            <a:schemeClr val="lt1"/>
+          </a:fontRef>
+        </p:style>
+        <p:txBody>
+          <a:bodyPr rtlCol="0" anchor="ctr"/>
+          <a:lstStyle/>
+          <a:p>
+            <a:pPr algn="ctr"/>
+          </a:p>
+        </p:txBody>
+      </p:sp>
+      <p:sp>
+        <p:nvSpPr>
+          <p:cNvPr id="11" name="Rectangle 10"/>
+          <p:cNvSpPr/>
+          <p:nvPr/>
+        </p:nvSpPr>
+        <p:spPr>
+          <a:xfrm>
+            <a:off x="2603500" y="1435100"/>
+            <a:ext cx="38100" cy="685800"/>
+          </a:xfrm>
+          <a:prstGeom prst="rect">
+            <a:avLst/>
+          </a:prstGeom>
+          <a:solidFill>
+            <a:srgbClr val="AEC8DE"/>
+          </a:solidFill>
+          <a:ln>
+            <a:noFill/>
+          </a:ln>
+          <a:effectLst/>
+        </p:spPr>
+        <p:style>
+          <a:lnRef idx="1">
+            <a:schemeClr val="accent1"/>
+          </a:lnRef>
+          <a:fillRef idx="3">
+            <a:schemeClr val="accent1"/>
+          </a:fillRef>
+          <a:effectRef idx="2">
+            <a:schemeClr val="accent1"/>
+          </a:effectRef>
+          <a:fontRef idx="minor">
+            <a:schemeClr val="lt1"/>
+          </a:fontRef>
+        </p:style>
+        <p:txBody>
+          <a:bodyPr rtlCol="0" anchor="ctr"/>
+          <a:lstStyle/>
+          <a:p>
+            <a:pPr algn="ctr"/>
+          </a:p>
+        </p:txBody>
+      </p:sp>
+      <p:sp>
+        <p:nvSpPr>
+          <p:cNvPr id="12" name="TextBox 11"/>
+          <p:cNvSpPr txBox="1"/>
+          <p:nvPr/>
+        </p:nvSpPr>
+        <p:spPr>
+          <a:xfrm>
+            <a:off x="2755900" y="1447800"/>
+            <a:ext cx="1638300" cy="304800"/>
+          </a:xfrm>
+          <a:prstGeom prst="rect">
+            <a:avLst/>
+          </a:prstGeom>
+          <a:noFill/>
+        </p:spPr>
+        <p:txBody>
+          <a:bodyPr wrap="square" anchor="b" lIns="0" rIns="0" tIns="0" bIns="0">
+            <a:spAutoFit/>
+          </a:bodyPr>
+          <a:lstStyle/>
+          <a:p>
+            <a:pPr algn="l">
+              <a:spcBef>
+                <a:spcPts val="0"/>
+              </a:spcBef>
+            </a:pPr>
+            <a:r>
+              <a:rPr sz="2300" b="1">
+                <a:solidFill>
+                  <a:srgbClr val="AEC8DE"/>
+                </a:solidFill>
+                <a:latin typeface="Arial"/>
+              </a:rPr>
+              <a:t>≈11%</a:t>
+            </a:r>
+            <a:r>
+              <a:rPr sz="1050" b="1">
+                <a:solidFill>
+                  <a:srgbClr val="AEC8DE"/>
+                </a:solidFill>
+                <a:latin typeface="Calibri"/>
+              </a:rPr>
+              <a:t/>
+            </a:r>
+          </a:p>
+        </p:txBody>
+      </p:sp>
+      <p:sp>
+        <p:nvSpPr>
+          <p:cNvPr id="13" name="TextBox 12"/>
+          <p:cNvSpPr txBox="1"/>
+          <p:nvPr/>
+        </p:nvSpPr>
+        <p:spPr>
+          <a:xfrm>
+            <a:off x="2755900" y="1752600"/>
+            <a:ext cx="1612900" cy="406400"/>
+          </a:xfrm>
+          <a:prstGeom prst="rect">
+            <a:avLst/>
+          </a:prstGeom>
+          <a:noFill/>
+        </p:spPr>
+        <p:txBody>
+          <a:bodyPr wrap="square" anchor="t" lIns="0" rIns="0" tIns="0" bIns="0">
+            <a:spAutoFit/>
+          </a:bodyPr>
+          <a:lstStyle/>
+          <a:p>
+            <a:pPr algn="l">
+              <a:lnSpc>
+                <a:spcPct val="100000"/>
+              </a:lnSpc>
+              <a:spcBef>
+                <a:spcPts val="0"/>
+              </a:spcBef>
+            </a:pPr>
+            <a:r>
+              <a:rPr sz="860" b="0">
+                <a:solidFill>
+                  <a:srgbClr val="AEC8DE"/>
+                </a:solidFill>
+                <a:latin typeface="Calibri"/>
+              </a:rPr>
+              <a:t>доля завода в импорте РК (75 тыс т)</a:t>
+            </a:r>
+          </a:p>
+        </p:txBody>
+      </p:sp>
+      <p:sp>
+        <p:nvSpPr>
+          <p:cNvPr id="14" name="Rounded Rectangle 13"/>
+          <p:cNvSpPr/>
+          <p:nvPr/>
+        </p:nvSpPr>
+        <p:spPr>
+          <a:xfrm>
+            <a:off x="4648200" y="1371600"/>
+            <a:ext cx="1917700" cy="812800"/>
+          </a:xfrm>
+          <a:prstGeom prst="roundRect">
+            <a:avLst>
+              <a:gd name="adj" fmla="val 10000"/>
+            </a:avLst>
+          </a:prstGeom>
+          <a:solidFill>
+            <a:srgbClr val="0C1D38"/>
+          </a:solidFill>
+          <a:ln w="12700">
+            <a:solidFill>
+              <a:srgbClr val="243A59"/>
+            </a:solidFill>
+          </a:ln>
+          <a:effectLst/>
+        </p:spPr>
+        <p:style>
+          <a:lnRef idx="1">
+            <a:schemeClr val="accent1"/>
+          </a:lnRef>
+          <a:fillRef idx="3">
+            <a:schemeClr val="accent1"/>
+          </a:fillRef>
+          <a:effectRef idx="2">
+            <a:schemeClr val="accent1"/>
+          </a:effectRef>
+          <a:fontRef idx="minor">
+            <a:schemeClr val="lt1"/>
+          </a:fontRef>
+        </p:style>
+        <p:txBody>
+          <a:bodyPr rtlCol="0" anchor="ctr"/>
+          <a:lstStyle/>
+          <a:p>
+            <a:pPr algn="ctr"/>
+          </a:p>
+        </p:txBody>
+      </p:sp>
+      <p:sp>
+        <p:nvSpPr>
+          <p:cNvPr id="15" name="Rectangle 14"/>
+          <p:cNvSpPr/>
+          <p:nvPr/>
+        </p:nvSpPr>
+        <p:spPr>
+          <a:xfrm>
+            <a:off x="4673600" y="1435100"/>
+            <a:ext cx="38100" cy="685800"/>
+          </a:xfrm>
+          <a:prstGeom prst="rect">
+            <a:avLst/>
+          </a:prstGeom>
+          <a:solidFill>
+            <a:srgbClr val="FFFFFF"/>
+          </a:solidFill>
+          <a:ln>
+            <a:noFill/>
+          </a:ln>
+          <a:effectLst/>
+        </p:spPr>
+        <p:style>
+          <a:lnRef idx="1">
+            <a:schemeClr val="accent1"/>
+          </a:lnRef>
+          <a:fillRef idx="3">
+            <a:schemeClr val="accent1"/>
+          </a:fillRef>
+          <a:effectRef idx="2">
+            <a:schemeClr val="accent1"/>
+          </a:effectRef>
+          <a:fontRef idx="minor">
+            <a:schemeClr val="lt1"/>
+          </a:fontRef>
+        </p:style>
+        <p:txBody>
+          <a:bodyPr rtlCol="0" anchor="ctr"/>
+          <a:lstStyle/>
+          <a:p>
+            <a:pPr algn="ctr"/>
+          </a:p>
+        </p:txBody>
+      </p:sp>
+      <p:sp>
+        <p:nvSpPr>
+          <p:cNvPr id="16" name="TextBox 15"/>
+          <p:cNvSpPr txBox="1"/>
+          <p:nvPr/>
+        </p:nvSpPr>
+        <p:spPr>
+          <a:xfrm>
+            <a:off x="4826000" y="1447800"/>
+            <a:ext cx="1638300" cy="304800"/>
+          </a:xfrm>
+          <a:prstGeom prst="rect">
+            <a:avLst/>
+          </a:prstGeom>
+          <a:noFill/>
+        </p:spPr>
+        <p:txBody>
+          <a:bodyPr wrap="square" anchor="b" lIns="0" rIns="0" tIns="0" bIns="0">
+            <a:spAutoFit/>
+          </a:bodyPr>
+          <a:lstStyle/>
+          <a:p>
+            <a:pPr algn="l">
+              <a:spcBef>
+                <a:spcPts val="0"/>
+              </a:spcBef>
+            </a:pPr>
+            <a:r>
+              <a:rPr sz="2300" b="1">
+                <a:solidFill>
+                  <a:srgbClr val="FFFFFF"/>
+                </a:solidFill>
+                <a:latin typeface="Arial"/>
+              </a:rPr>
+              <a:t>$34</a:t>
+            </a:r>
+            <a:r>
+              <a:rPr sz="1050" b="1">
+                <a:solidFill>
+                  <a:srgbClr val="AEC8DE"/>
+                </a:solidFill>
+                <a:latin typeface="Calibri"/>
+              </a:rPr>
+              <a:t> млн/год</a:t>
+            </a:r>
+          </a:p>
+        </p:txBody>
+      </p:sp>
+      <p:sp>
+        <p:nvSpPr>
+          <p:cNvPr id="17" name="TextBox 16"/>
+          <p:cNvSpPr txBox="1"/>
+          <p:nvPr/>
+        </p:nvSpPr>
+        <p:spPr>
+          <a:xfrm>
+            <a:off x="4826000" y="1752600"/>
+            <a:ext cx="1612900" cy="406400"/>
+          </a:xfrm>
+          <a:prstGeom prst="rect">
+            <a:avLst/>
+          </a:prstGeom>
+          <a:noFill/>
+        </p:spPr>
+        <p:txBody>
+          <a:bodyPr wrap="square" anchor="t" lIns="0" rIns="0" tIns="0" bIns="0">
+            <a:spAutoFit/>
+          </a:bodyPr>
+          <a:lstStyle/>
+          <a:p>
+            <a:pPr algn="l">
+              <a:lnSpc>
+                <a:spcPct val="100000"/>
+              </a:lnSpc>
+              <a:spcBef>
+                <a:spcPts val="0"/>
+              </a:spcBef>
+            </a:pPr>
+            <a:r>
+              <a:rPr sz="860" b="0">
+                <a:solidFill>
+                  <a:srgbClr val="AEC8DE"/>
+                </a:solidFill>
+                <a:latin typeface="Calibri"/>
+              </a:rPr>
+              <a:t>выручка ОМУ (75 тыс т × $450/т)</a:t>
+            </a:r>
+          </a:p>
+        </p:txBody>
+      </p:sp>
+      <p:sp>
+        <p:nvSpPr>
+          <p:cNvPr id="18" name="Rounded Rectangle 17"/>
+          <p:cNvSpPr/>
+          <p:nvPr/>
+        </p:nvSpPr>
+        <p:spPr>
+          <a:xfrm>
+            <a:off x="6718300" y="1371600"/>
+            <a:ext cx="1917700" cy="812800"/>
+          </a:xfrm>
+          <a:prstGeom prst="roundRect">
+            <a:avLst>
+              <a:gd name="adj" fmla="val 10000"/>
+            </a:avLst>
+          </a:prstGeom>
+          <a:solidFill>
+            <a:srgbClr val="0C1D38"/>
+          </a:solidFill>
+          <a:ln w="12700">
+            <a:solidFill>
+              <a:srgbClr val="243A59"/>
+            </a:solidFill>
+          </a:ln>
+          <a:effectLst/>
+        </p:spPr>
+        <p:style>
+          <a:lnRef idx="1">
+            <a:schemeClr val="accent1"/>
+          </a:lnRef>
+          <a:fillRef idx="3">
+            <a:schemeClr val="accent1"/>
+          </a:fillRef>
+          <a:effectRef idx="2">
+            <a:schemeClr val="accent1"/>
+          </a:effectRef>
+          <a:fontRef idx="minor">
+            <a:schemeClr val="lt1"/>
+          </a:fontRef>
+        </p:style>
+        <p:txBody>
+          <a:bodyPr rtlCol="0" anchor="ctr"/>
+          <a:lstStyle/>
+          <a:p>
+            <a:pPr algn="ctr"/>
+          </a:p>
+        </p:txBody>
+      </p:sp>
+      <p:sp>
+        <p:nvSpPr>
+          <p:cNvPr id="19" name="Rectangle 18"/>
+          <p:cNvSpPr/>
+          <p:nvPr/>
+        </p:nvSpPr>
+        <p:spPr>
+          <a:xfrm>
+            <a:off x="6743700" y="1435100"/>
+            <a:ext cx="38100" cy="685800"/>
+          </a:xfrm>
+          <a:prstGeom prst="rect">
+            <a:avLst/>
+          </a:prstGeom>
+          <a:solidFill>
+            <a:srgbClr val="E0A46A"/>
+          </a:solidFill>
+          <a:ln>
+            <a:noFill/>
+          </a:ln>
+          <a:effectLst/>
+        </p:spPr>
+        <p:style>
+          <a:lnRef idx="1">
+            <a:schemeClr val="accent1"/>
+          </a:lnRef>
+          <a:fillRef idx="3">
+            <a:schemeClr val="accent1"/>
+          </a:fillRef>
+          <a:effectRef idx="2">
+            <a:schemeClr val="accent1"/>
+          </a:effectRef>
+          <a:fontRef idx="minor">
+            <a:schemeClr val="lt1"/>
+          </a:fontRef>
+        </p:style>
+        <p:txBody>
+          <a:bodyPr rtlCol="0" anchor="ctr"/>
+          <a:lstStyle/>
+          <a:p>
+            <a:pPr algn="ctr"/>
+          </a:p>
+        </p:txBody>
+      </p:sp>
+      <p:sp>
+        <p:nvSpPr>
+          <p:cNvPr id="20" name="TextBox 19"/>
+          <p:cNvSpPr txBox="1"/>
+          <p:nvPr/>
+        </p:nvSpPr>
+        <p:spPr>
+          <a:xfrm>
+            <a:off x="6896100" y="1447800"/>
+            <a:ext cx="1638300" cy="304800"/>
+          </a:xfrm>
+          <a:prstGeom prst="rect">
+            <a:avLst/>
+          </a:prstGeom>
+          <a:noFill/>
+        </p:spPr>
+        <p:txBody>
+          <a:bodyPr wrap="square" anchor="b" lIns="0" rIns="0" tIns="0" bIns="0">
+            <a:spAutoFit/>
+          </a:bodyPr>
+          <a:lstStyle/>
+          <a:p>
+            <a:pPr algn="l">
+              <a:spcBef>
+                <a:spcPts val="0"/>
+              </a:spcBef>
+            </a:pPr>
+            <a:r>
+              <a:rPr sz="2300" b="1">
+                <a:solidFill>
+                  <a:srgbClr val="E0A46A"/>
+                </a:solidFill>
+                <a:latin typeface="Arial"/>
+              </a:rPr>
+              <a:t>≈48%</a:t>
+            </a:r>
+            <a:r>
+              <a:rPr sz="1050" b="1">
+                <a:solidFill>
+                  <a:srgbClr val="AEC8DE"/>
+                </a:solidFill>
+                <a:latin typeface="Calibri"/>
+              </a:rPr>
+              <a:t/>
+            </a:r>
+          </a:p>
+        </p:txBody>
+      </p:sp>
+      <p:sp>
+        <p:nvSpPr>
+          <p:cNvPr id="21" name="TextBox 20"/>
+          <p:cNvSpPr txBox="1"/>
+          <p:nvPr/>
+        </p:nvSpPr>
+        <p:spPr>
+          <a:xfrm>
+            <a:off x="6896100" y="1752600"/>
+            <a:ext cx="1612900" cy="406400"/>
+          </a:xfrm>
+          <a:prstGeom prst="rect">
+            <a:avLst/>
+          </a:prstGeom>
+          <a:noFill/>
+        </p:spPr>
+        <p:txBody>
+          <a:bodyPr wrap="square" anchor="t" lIns="0" rIns="0" tIns="0" bIns="0">
+            <a:spAutoFit/>
+          </a:bodyPr>
+          <a:lstStyle/>
+          <a:p>
+            <a:pPr algn="l">
+              <a:lnSpc>
+                <a:spcPct val="100000"/>
+              </a:lnSpc>
+              <a:spcBef>
+                <a:spcPts val="0"/>
+              </a:spcBef>
+            </a:pPr>
+            <a:r>
+              <a:rPr sz="860" b="0">
+                <a:solidFill>
+                  <a:srgbClr val="AEC8DE"/>
+                </a:solidFill>
+                <a:latin typeface="Calibri"/>
+              </a:rPr>
+              <a:t>валовая маржа ОМУ ($217/т)</a:t>
+            </a:r>
+          </a:p>
+        </p:txBody>
+      </p:sp>
+      <p:sp>
+        <p:nvSpPr>
+          <p:cNvPr id="22" name="Rounded Rectangle 21"/>
+          <p:cNvSpPr/>
+          <p:nvPr/>
+        </p:nvSpPr>
+        <p:spPr>
+          <a:xfrm>
+            <a:off x="508000" y="2362200"/>
+            <a:ext cx="8128000" cy="1168400"/>
+          </a:xfrm>
+          <a:prstGeom prst="roundRect">
+            <a:avLst>
+              <a:gd name="adj" fmla="val 4000"/>
+            </a:avLst>
+          </a:prstGeom>
+          <a:solidFill>
+            <a:srgbClr val="0C1D38"/>
+          </a:solidFill>
+          <a:ln w="12700">
+            <a:solidFill>
+              <a:srgbClr val="243A59"/>
+            </a:solidFill>
+          </a:ln>
+          <a:effectLst/>
+        </p:spPr>
+        <p:style>
+          <a:lnRef idx="1">
+            <a:schemeClr val="accent1"/>
+          </a:lnRef>
+          <a:fillRef idx="3">
+            <a:schemeClr val="accent1"/>
+          </a:fillRef>
+          <a:effectRef idx="2">
+            <a:schemeClr val="accent1"/>
+          </a:effectRef>
+          <a:fontRef idx="minor">
+            <a:schemeClr val="lt1"/>
+          </a:fontRef>
+        </p:style>
+        <p:txBody>
+          <a:bodyPr rtlCol="0" anchor="ctr"/>
+          <a:lstStyle/>
+          <a:p>
+            <a:pPr algn="ctr"/>
+          </a:p>
+        </p:txBody>
+      </p:sp>
+      <p:sp>
+        <p:nvSpPr>
+          <p:cNvPr id="23" name="Rectangle 22"/>
+          <p:cNvSpPr/>
+          <p:nvPr/>
+        </p:nvSpPr>
+        <p:spPr>
+          <a:xfrm>
+            <a:off x="711200" y="2540000"/>
+            <a:ext cx="63500" cy="63500"/>
+          </a:xfrm>
+          <a:prstGeom prst="rect">
+            <a:avLst/>
+          </a:prstGeom>
+          <a:solidFill>
+            <a:srgbClr val="E0A46A"/>
+          </a:solidFill>
+          <a:ln>
+            <a:noFill/>
+          </a:ln>
+          <a:effectLst/>
+        </p:spPr>
+        <p:style>
+          <a:lnRef idx="1">
+            <a:schemeClr val="accent1"/>
+          </a:lnRef>
+          <a:fillRef idx="3">
+            <a:schemeClr val="accent1"/>
+          </a:fillRef>
+          <a:effectRef idx="2">
+            <a:schemeClr val="accent1"/>
+          </a:effectRef>
+          <a:fontRef idx="minor">
+            <a:schemeClr val="lt1"/>
+          </a:fontRef>
+        </p:style>
+        <p:txBody>
+          <a:bodyPr rtlCol="0" anchor="ctr"/>
+          <a:lstStyle/>
+          <a:p>
+            <a:pPr algn="ctr"/>
+          </a:p>
+        </p:txBody>
+      </p:sp>
+      <p:sp>
+        <p:nvSpPr>
+          <p:cNvPr id="24" name="TextBox 23"/>
+          <p:cNvSpPr txBox="1"/>
+          <p:nvPr/>
+        </p:nvSpPr>
+        <p:spPr>
+          <a:xfrm>
+            <a:off x="889000" y="2489200"/>
+            <a:ext cx="7569200" cy="279400"/>
+          </a:xfrm>
+          <a:prstGeom prst="rect">
+            <a:avLst/>
+          </a:prstGeom>
+          <a:noFill/>
+        </p:spPr>
+        <p:txBody>
+          <a:bodyPr wrap="square" anchor="t" lIns="0" rIns="0" tIns="0" bIns="0">
+            <a:spAutoFit/>
+          </a:bodyPr>
+          <a:lstStyle/>
+          <a:p>
+            <a:pPr algn="l">
+              <a:lnSpc>
+                <a:spcPct val="102000"/>
+              </a:lnSpc>
+              <a:spcBef>
+                <a:spcPts val="0"/>
+              </a:spcBef>
+            </a:pPr>
+            <a:r>
+              <a:rPr sz="969" b="0">
+                <a:solidFill>
+                  <a:srgbClr val="D6E0EC"/>
+                </a:solidFill>
+                <a:latin typeface="Calibri"/>
+              </a:rPr>
+              <a:t>Импортозамещение — государственный приоритет: спрос структурный и растущий, не привязан к сырьевому суперциклу.</a:t>
+            </a:r>
+          </a:p>
+        </p:txBody>
+      </p:sp>
+      <p:sp>
+        <p:nvSpPr>
+          <p:cNvPr id="25" name="Rectangle 24"/>
+          <p:cNvSpPr/>
+          <p:nvPr/>
+        </p:nvSpPr>
+        <p:spPr>
+          <a:xfrm>
+            <a:off x="711200" y="2882900"/>
+            <a:ext cx="63500" cy="63500"/>
+          </a:xfrm>
+          <a:prstGeom prst="rect">
+            <a:avLst/>
+          </a:prstGeom>
+          <a:solidFill>
+            <a:srgbClr val="E0A46A"/>
+          </a:solidFill>
+          <a:ln>
+            <a:noFill/>
+          </a:ln>
+          <a:effectLst/>
+        </p:spPr>
+        <p:style>
+          <a:lnRef idx="1">
+            <a:schemeClr val="accent1"/>
+          </a:lnRef>
+          <a:fillRef idx="3">
+            <a:schemeClr val="accent1"/>
+          </a:fillRef>
+          <a:effectRef idx="2">
+            <a:schemeClr val="accent1"/>
+          </a:effectRef>
+          <a:fontRef idx="minor">
+            <a:schemeClr val="lt1"/>
+          </a:fontRef>
+        </p:style>
+        <p:txBody>
+          <a:bodyPr rtlCol="0" anchor="ctr"/>
+          <a:lstStyle/>
+          <a:p>
+            <a:pPr algn="ctr"/>
+          </a:p>
+        </p:txBody>
+      </p:sp>
+      <p:sp>
+        <p:nvSpPr>
+          <p:cNvPr id="26" name="TextBox 25"/>
+          <p:cNvSpPr txBox="1"/>
+          <p:nvPr/>
+        </p:nvSpPr>
+        <p:spPr>
+          <a:xfrm>
+            <a:off x="889000" y="2832100"/>
+            <a:ext cx="7569200" cy="279400"/>
+          </a:xfrm>
+          <a:prstGeom prst="rect">
+            <a:avLst/>
+          </a:prstGeom>
+          <a:noFill/>
+        </p:spPr>
+        <p:txBody>
+          <a:bodyPr wrap="square" anchor="t" lIns="0" rIns="0" tIns="0" bIns="0">
+            <a:spAutoFit/>
+          </a:bodyPr>
+          <a:lstStyle/>
+          <a:p>
+            <a:pPr algn="l">
+              <a:lnSpc>
+                <a:spcPct val="102000"/>
+              </a:lnSpc>
+              <a:spcBef>
+                <a:spcPts val="0"/>
+              </a:spcBef>
+            </a:pPr>
+            <a:r>
+              <a:rPr sz="969" b="0">
+                <a:solidFill>
+                  <a:srgbClr val="D6E0EC"/>
+                </a:solidFill>
+                <a:latin typeface="Calibri"/>
+              </a:rPr>
+              <a:t>Ценовое преимущество: ОМУ на ≈ 29% дешевле импортных комплексных удобрений (~$630/т) при эффективности 1:3 (ФАО).</a:t>
+            </a:r>
+          </a:p>
+        </p:txBody>
+      </p:sp>
+      <p:sp>
+        <p:nvSpPr>
+          <p:cNvPr id="27" name="Rectangle 26"/>
+          <p:cNvSpPr/>
+          <p:nvPr/>
+        </p:nvSpPr>
+        <p:spPr>
+          <a:xfrm>
+            <a:off x="711200" y="3225800"/>
+            <a:ext cx="63500" cy="63500"/>
+          </a:xfrm>
+          <a:prstGeom prst="rect">
+            <a:avLst/>
+          </a:prstGeom>
+          <a:solidFill>
+            <a:srgbClr val="E0A46A"/>
+          </a:solidFill>
+          <a:ln>
+            <a:noFill/>
+          </a:ln>
+          <a:effectLst/>
+        </p:spPr>
+        <p:style>
+          <a:lnRef idx="1">
+            <a:schemeClr val="accent1"/>
+          </a:lnRef>
+          <a:fillRef idx="3">
+            <a:schemeClr val="accent1"/>
+          </a:fillRef>
+          <a:effectRef idx="2">
+            <a:schemeClr val="accent1"/>
+          </a:effectRef>
+          <a:fontRef idx="minor">
+            <a:schemeClr val="lt1"/>
+          </a:fontRef>
+        </p:style>
+        <p:txBody>
+          <a:bodyPr rtlCol="0" anchor="ctr"/>
+          <a:lstStyle/>
+          <a:p>
+            <a:pPr algn="ctr"/>
+          </a:p>
+        </p:txBody>
+      </p:sp>
+      <p:sp>
+        <p:nvSpPr>
+          <p:cNvPr id="28" name="TextBox 27"/>
+          <p:cNvSpPr txBox="1"/>
+          <p:nvPr/>
+        </p:nvSpPr>
+        <p:spPr>
+          <a:xfrm>
+            <a:off x="889000" y="3175000"/>
+            <a:ext cx="7569200" cy="279400"/>
+          </a:xfrm>
+          <a:prstGeom prst="rect">
+            <a:avLst/>
+          </a:prstGeom>
+          <a:noFill/>
+        </p:spPr>
+        <p:txBody>
+          <a:bodyPr wrap="square" anchor="t" lIns="0" rIns="0" tIns="0" bIns="0">
+            <a:spAutoFit/>
+          </a:bodyPr>
+          <a:lstStyle/>
+          <a:p>
+            <a:pPr algn="l">
+              <a:lnSpc>
+                <a:spcPct val="102000"/>
+              </a:lnSpc>
+              <a:spcBef>
+                <a:spcPts val="0"/>
+              </a:spcBef>
+            </a:pPr>
+            <a:r>
+              <a:rPr sz="969" b="0">
+                <a:solidFill>
+                  <a:srgbClr val="D6E0EC"/>
+                </a:solidFill>
+                <a:latin typeface="Calibri"/>
+              </a:rPr>
+              <a:t>Локальная себестоимость ($233/т) и короткое логистическое плечо ($25/т) защищают маржу от волатильности мировых цен.</a:t>
+            </a:r>
+          </a:p>
+        </p:txBody>
+      </p:sp>
+      <p:sp>
+        <p:nvSpPr>
+          <p:cNvPr id="29" name="Rounded Rectangle 28"/>
+          <p:cNvSpPr/>
+          <p:nvPr/>
+        </p:nvSpPr>
+        <p:spPr>
+          <a:xfrm>
+            <a:off x="508000" y="3683000"/>
+            <a:ext cx="8128000" cy="584200"/>
+          </a:xfrm>
+          <a:prstGeom prst="roundRect">
+            <a:avLst>
+              <a:gd name="adj" fmla="val 6000"/>
+            </a:avLst>
+          </a:prstGeom>
+          <a:solidFill>
+            <a:srgbClr val="E0A46A"/>
+          </a:solidFill>
+          <a:ln>
+            <a:noFill/>
+          </a:ln>
+          <a:effectLst/>
+        </p:spPr>
+        <p:style>
+          <a:lnRef idx="1">
+            <a:schemeClr val="accent1"/>
+          </a:lnRef>
+          <a:fillRef idx="3">
+            <a:schemeClr val="accent1"/>
+          </a:fillRef>
+          <a:effectRef idx="2">
+            <a:schemeClr val="accent1"/>
+          </a:effectRef>
+          <a:fontRef idx="minor">
+            <a:schemeClr val="lt1"/>
+          </a:fontRef>
+        </p:style>
+        <p:txBody>
+          <a:bodyPr rtlCol="0" anchor="ctr"/>
+          <a:lstStyle/>
+          <a:p>
+            <a:pPr algn="ctr"/>
+          </a:p>
+        </p:txBody>
+      </p:sp>
+      <p:sp>
+        <p:nvSpPr>
+          <p:cNvPr id="30" name="TextBox 29"/>
+          <p:cNvSpPr txBox="1"/>
+          <p:nvPr/>
+        </p:nvSpPr>
+        <p:spPr>
+          <a:xfrm>
+            <a:off x="711200" y="3683000"/>
+            <a:ext cx="7747000" cy="584200"/>
+          </a:xfrm>
+          <a:prstGeom prst="rect">
+            <a:avLst/>
+          </a:prstGeom>
+          <a:noFill/>
+        </p:spPr>
+        <p:txBody>
+          <a:bodyPr wrap="square" anchor="ctr" lIns="0" rIns="0" tIns="0" bIns="0">
+            <a:spAutoFit/>
+          </a:bodyPr>
+          <a:lstStyle/>
+          <a:p>
+            <a:pPr algn="l">
+              <a:spcBef>
+                <a:spcPts val="0"/>
+              </a:spcBef>
+            </a:pPr>
+            <a:r>
+              <a:rPr sz="1000" b="1">
+                <a:solidFill>
+                  <a:srgbClr val="13294B"/>
+                </a:solidFill>
+                <a:latin typeface="Calibri"/>
+              </a:rPr>
+              <a:t>ПРОЕКТНАЯ ЭКОНОМИКА:  </a:t>
+            </a:r>
+            <a:r>
+              <a:rPr sz="1000" b="1">
+                <a:solidFill>
+                  <a:srgbClr val="3A2A12"/>
+                </a:solidFill>
+                <a:latin typeface="Calibri"/>
+              </a:rPr>
+              <a:t>IRR 31%  ·  NPV ≈ 30,8 млрд ₸  ·  окупаемость ≈ 5 лет  —  подтверждается рыночной позицией (цена ОМУ $450/т).</a:t>
+            </a:r>
+          </a:p>
+        </p:txBody>
+      </p:sp>
+      <p:sp>
+        <p:nvSpPr>
+          <p:cNvPr id="31" name="TextBox 30"/>
+          <p:cNvSpPr txBox="1"/>
+          <p:nvPr/>
+        </p:nvSpPr>
+        <p:spPr>
+          <a:xfrm>
+            <a:off x="508000" y="4572000"/>
+            <a:ext cx="7112000" cy="152400"/>
+          </a:xfrm>
+          <a:prstGeom prst="rect">
+            <a:avLst/>
+          </a:prstGeom>
+          <a:noFill/>
+        </p:spPr>
+        <p:txBody>
+          <a:bodyPr wrap="square" anchor="t" lIns="0" rIns="0" tIns="0" bIns="0">
+            <a:spAutoFit/>
+          </a:bodyPr>
+          <a:lstStyle/>
+          <a:p>
+            <a:pPr algn="l">
+              <a:spcBef>
+                <a:spcPts val="0"/>
+              </a:spcBef>
+            </a:pPr>
+            <a:r>
+              <a:rPr sz="700" b="0">
+                <a:solidFill>
+                  <a:srgbClr val="6F8298"/>
+                </a:solidFill>
+                <a:latin typeface="Calibri"/>
+              </a:rPr>
+              <a:t>Расчёты менеджмента на основе проектных данных (≥75 тыс т/год, цена $450/т) и рыночных источников IFA / World Bank / БНС РК.</a:t>
+            </a:r>
+          </a:p>
+        </p:txBody>
+      </p:sp>
+      <p:cxnSp>
+        <p:nvCxnSpPr>
+          <p:cNvPr id="32" name="Connector 31"/>
+          <p:cNvCxnSpPr/>
+          <p:nvPr/>
+        </p:nvCxnSpPr>
+        <p:spPr>
+          <a:xfrm>
+            <a:off x="508000" y="4749800"/>
+            <a:ext cx="8140700" cy="0"/>
+          </a:xfrm>
+          <a:prstGeom prst="line">
+            <a:avLst/>
+          </a:prstGeom>
+          <a:ln w="9525">
+            <a:solidFill>
+              <a:srgbClr val="2A3D5C"/>
+            </a:solidFill>
+          </a:ln>
+          <a:effectLst/>
+        </p:spPr>
+        <p:style>
+          <a:lnRef idx="2">
+            <a:schemeClr val="accent1"/>
+          </a:lnRef>
+          <a:fillRef idx="0">
+            <a:schemeClr val="accent1"/>
+          </a:fillRef>
+          <a:effectRef idx="1">
+            <a:schemeClr val="accent1"/>
+          </a:effectRef>
+          <a:fontRef idx="minor">
+            <a:schemeClr val="tx1"/>
+          </a:fontRef>
+        </p:style>
+      </p:cxnSp>
+      <p:sp>
+        <p:nvSpPr>
+          <p:cNvPr id="33" name="TextBox 32"/>
+          <p:cNvSpPr txBox="1"/>
+          <p:nvPr/>
+        </p:nvSpPr>
+        <p:spPr>
+          <a:xfrm>
+            <a:off x="508000" y="4826000"/>
+            <a:ext cx="5486400" cy="228600"/>
+          </a:xfrm>
+          <a:prstGeom prst="rect">
+            <a:avLst/>
+          </a:prstGeom>
+          <a:noFill/>
+        </p:spPr>
+        <p:txBody>
+          <a:bodyPr wrap="square" anchor="t" lIns="0" rIns="0" tIns="0" bIns="0">
+            <a:spAutoFit/>
+          </a:bodyPr>
+          <a:lstStyle/>
+          <a:p>
+            <a:pPr algn="l">
+              <a:spcBef>
+                <a:spcPts val="0"/>
+              </a:spcBef>
+            </a:pPr>
+            <a:r>
+              <a:rPr sz="850" b="1">
+                <a:solidFill>
+                  <a:srgbClr val="AEC8DE"/>
+                </a:solidFill>
+                <a:latin typeface="Calibri"/>
+              </a:rPr>
+              <a:t>KazBioFert / BBFF</a:t>
+            </a:r>
+            <a:r>
+              <a:rPr sz="850" b="0">
+                <a:solidFill>
+                  <a:srgbClr val="8A9AAD"/>
+                </a:solidFill>
+                <a:latin typeface="Calibri"/>
+              </a:rPr>
+              <a:t>  ·  Совет директоров</a:t>
+            </a:r>
+          </a:p>
+        </p:txBody>
+      </p:sp>
+      <p:sp>
+        <p:nvSpPr>
+          <p:cNvPr id="34" name="TextBox 33"/>
+          <p:cNvSpPr txBox="1"/>
+          <p:nvPr/>
+        </p:nvSpPr>
+        <p:spPr>
+          <a:xfrm>
+            <a:off x="3810000" y="4826000"/>
+            <a:ext cx="4445000" cy="228600"/>
+          </a:xfrm>
+          <a:prstGeom prst="rect">
+            <a:avLst/>
+          </a:prstGeom>
+          <a:noFill/>
+        </p:spPr>
+        <p:txBody>
+          <a:bodyPr wrap="square" anchor="t" lIns="0" rIns="0" tIns="0" bIns="0">
+            <a:spAutoFit/>
+          </a:bodyPr>
+          <a:lstStyle/>
+          <a:p>
+            <a:pPr algn="r">
+              <a:spcBef>
+                <a:spcPts val="0"/>
+              </a:spcBef>
+            </a:pPr>
+            <a:r>
+              <a:rPr sz="800" b="0" spc="80">
+                <a:solidFill>
+                  <a:srgbClr val="8A9AAD"/>
+                </a:solidFill>
+                <a:latin typeface="Calibri"/>
+              </a:rPr>
+              <a:t>АНАЛИЗ РЫНКА · ИНВЕСТИЦИОННЫЙ ТЕЗИС</a:t>
+            </a:r>
+          </a:p>
+        </p:txBody>
+      </p:sp>
+      <p:sp>
+        <p:nvSpPr>
+          <p:cNvPr id="35" name="TextBox 34"/>
+          <p:cNvSpPr txBox="1"/>
+          <p:nvPr/>
+        </p:nvSpPr>
+        <p:spPr>
+          <a:xfrm>
+            <a:off x="8280400" y="4826000"/>
+            <a:ext cx="368300" cy="228600"/>
+          </a:xfrm>
+          <a:prstGeom prst="rect">
+            <a:avLst/>
+          </a:prstGeom>
+          <a:noFill/>
+        </p:spPr>
+        <p:txBody>
+          <a:bodyPr wrap="square" anchor="t" lIns="0" rIns="0" tIns="0" bIns="0">
+            <a:spAutoFit/>
+          </a:bodyPr>
+          <a:lstStyle/>
+          <a:p>
+            <a:pPr algn="r">
+              <a:spcBef>
+                <a:spcPts val="0"/>
+              </a:spcBef>
+            </a:pPr>
+            <a:r>
+              <a:rPr sz="900" b="1">
+                <a:solidFill>
+                  <a:srgbClr val="8A9AAD"/>
+                </a:solidFill>
+                <a:latin typeface="Calibri"/>
+              </a:rPr>
+              <a:t>19</a:t>
             </a:r>
           </a:p>
         </p:txBody>

--- a/KazBioFert_Board_Presentation_FINAL_20260709.pptx
+++ b/KazBioFert_Board_Presentation_FINAL_20260709.pptx
@@ -15536,7 +15536,7 @@
                 <a:ea typeface="Calibri" pitchFamily="34" charset="-122"/>
                 <a:cs typeface="Calibri" pitchFamily="34" charset="-120"/>
               </a:rPr>
-              <a:t>ПРОДУКТ · ≥ 75 000 Т/ГОД</a:t>
+              <a:t>ПРОДУКТ · ≥ 80 000 Т/ГОД</a:t>
             </a:r>
             <a:endParaRPr lang="en-US" sz="1000" dirty="0"/>
           </a:p>
@@ -24161,7 +24161,7 @@
                 </a:solidFill>
                 <a:latin typeface="Arial"/>
               </a:rPr>
-              <a:t>≈48%</a:t>
+              <a:t>≈52%</a:t>
             </a:r>
             <a:r>
               <a:rPr sz="1050" b="1">
@@ -24212,7 +24212,7 @@
                 </a:solidFill>
                 <a:latin typeface="Calibri"/>
               </a:rPr>
-              <a:t>валовая маржа ОМУ · $233 себест. → $450 цена</a:t>
+              <a:t>валовая маржа ОМУ · $233 себест. → $487 цена</a:t>
             </a:r>
           </a:p>
         </p:txBody>
@@ -25577,7 +25577,7 @@
         <p:spPr>
           <a:xfrm>
             <a:off x="508000" y="4572000"/>
-            <a:ext cx="7112000" cy="152400"/>
+            <a:ext cx="8026400" cy="152400"/>
           </a:xfrm>
           <a:prstGeom prst="rect">
             <a:avLst/>
@@ -26657,7 +26657,7 @@
                 </a:solidFill>
                 <a:latin typeface="Calibri"/>
               </a:rPr>
-              <a:t>доля завода (75 тыс т ОМУ) в потреблении РК</a:t>
+              <a:t>доля завода (80 тыс т ОМУ) в потреблении РК</a:t>
             </a:r>
           </a:p>
         </p:txBody>
@@ -26907,7 +26907,7 @@
                 </a:solidFill>
                 <a:latin typeface="Calibri"/>
               </a:rPr>
-              <a:t>внесение в 15–20× ниже нормы и рост импорта (552 → 700 тыс т за 2023–2025) формируют структурный, растущий спрос на доступные ОМУ; завод (75 тыс т) закрывает ≈ 11% импорта РК.</a:t>
+              <a:t>внесение в 15–20× ниже нормы и рост импорта (552 → 700 тыс т за 2023–2025) формируют структурный, растущий спрос на доступные ОМУ; завод (80 тыс т) закрывает ≈ 11% импорта РК.</a:t>
             </a:r>
           </a:p>
         </p:txBody>
@@ -26921,7 +26921,7 @@
         <p:spPr>
           <a:xfrm>
             <a:off x="508000" y="4572000"/>
-            <a:ext cx="7112000" cy="152400"/>
+            <a:ext cx="8026400" cy="152400"/>
           </a:xfrm>
           <a:prstGeom prst="rect">
             <a:avLst/>
@@ -27212,7 +27212,7 @@
                 </a:solidFill>
                 <a:latin typeface="Arial"/>
               </a:rPr>
-              <a:t>Себестоимость ОМУ $233/т при цене реализации $450/т</a:t>
+              <a:t>Цена ОМУ $487/т ниже импортного паритета $630/т</a:t>
             </a:r>
           </a:p>
         </p:txBody>
@@ -27251,7 +27251,7 @@
                 </a:solidFill>
                 <a:latin typeface="Calibri"/>
               </a:rPr>
-              <a:t>ОМУ NPK 8-21: сырьё $194 + производство (с пост. расходами) $39 = $233/т; валовая маржа ≈ 48%</a:t>
+              <a:t>Цена реализации по фин. модели $487/т; себестоимость $233/т (сырьё $194 + производство $39); валовая маржа ≈ 52%</a:t>
             </a:r>
           </a:p>
         </p:txBody>
@@ -27517,8 +27517,8 @@
         </p:nvSpPr>
         <p:spPr>
           <a:xfrm>
-            <a:off x="1524000" y="2340428"/>
-            <a:ext cx="533400" cy="1088571"/>
+            <a:off x="1524000" y="2250923"/>
+            <a:ext cx="533400" cy="1178076"/>
           </a:xfrm>
           <a:prstGeom prst="roundRect">
             <a:avLst>
@@ -27563,7 +27563,7 @@
         </p:nvSpPr>
         <p:spPr>
           <a:xfrm>
-            <a:off x="1447800" y="2137228"/>
+            <a:off x="1447800" y="2047723"/>
             <a:ext cx="685800" cy="177800"/>
           </a:xfrm>
           <a:prstGeom prst="rect">
@@ -27589,7 +27589,7 @@
                 </a:solidFill>
                 <a:latin typeface="Calibri"/>
               </a:rPr>
-              <a:t>$450</a:t>
+              <a:t>$487</a:t>
             </a:r>
           </a:p>
         </p:txBody>
@@ -27879,7 +27879,7 @@
                 </a:solidFill>
                 <a:latin typeface="Arial"/>
               </a:rPr>
-              <a:t>≈48%</a:t>
+              <a:t>≈52%</a:t>
             </a:r>
           </a:p>
         </p:txBody>
@@ -27957,7 +27957,7 @@
                 </a:solidFill>
                 <a:latin typeface="Calibri"/>
               </a:rPr>
-              <a:t>$217 на тонну ОМУ</a:t>
+              <a:t>$254 на тонну ОМУ</a:t>
             </a:r>
           </a:p>
         </p:txBody>
@@ -28032,7 +28032,7 @@
                 </a:solidFill>
                 <a:latin typeface="Arial"/>
               </a:rPr>
-              <a:t>−29%</a:t>
+              <a:t>−23%</a:t>
             </a:r>
           </a:p>
         </p:txBody>
@@ -28863,7 +28863,7 @@
                 </a:solidFill>
                 <a:latin typeface="Calibri"/>
               </a:rPr>
-              <a:t>ОМУ на ≈ 29% дешевле импортных комплексных удобрений (~$630/т) при эффективности питательных веществ 1:3 (ФАО) и локальном сырье — устойчивая юнит-экономика независимо от глобальных цен.</a:t>
+              <a:t>ОМУ на ≈ 23% дешевле импортных комплексных удобрений (~$630/т) при эффективности питательных веществ 1:3 (ФАО) и локальном сырье — устойчивая юнит-экономика независимо от глобальных цен.</a:t>
             </a:r>
           </a:p>
         </p:txBody>
@@ -28877,7 +28877,7 @@
         <p:spPr>
           <a:xfrm>
             <a:off x="508000" y="4572000"/>
-            <a:ext cx="7112000" cy="152400"/>
+            <a:ext cx="8026400" cy="152400"/>
           </a:xfrm>
           <a:prstGeom prst="rect">
             <a:avLst/>
@@ -28902,7 +28902,7 @@
                 </a:solidFill>
                 <a:latin typeface="Calibri"/>
               </a:rPr>
-              <a:t>Источники: маркетинговый анализ проекта, 2026; World Bank, 06.2026; ФАО (эффективность 1:3). Цены — ориентировочные, до подтверждения контрактами.</a:t>
+              <a:t>Цена реализации — по фин. модели FEM v11.5 ($487/т, к выходу ≈57% валовой маржи); рыночная средняя ≈$450/т; импорт ~$630/т (World Bank, 06.2026); эффективность 1:3 (ФАО).</a:t>
             </a:r>
           </a:p>
         </p:txBody>
@@ -29607,7 +29607,7 @@
                 </a:solidFill>
                 <a:latin typeface="Calibri"/>
               </a:rPr>
-              <a:t>доля завода в импорте РК (75 тыс т)</a:t>
+              <a:t>доля завода в импорте РК (80 тыс т)</a:t>
             </a:r>
           </a:p>
         </p:txBody>
@@ -29738,7 +29738,7 @@
                 </a:solidFill>
                 <a:latin typeface="Arial"/>
               </a:rPr>
-              <a:t>$34</a:t>
+              <a:t>≈24</a:t>
             </a:r>
             <a:r>
               <a:rPr sz="1050" b="1">
@@ -29747,7 +29747,7 @@
                 </a:solidFill>
                 <a:latin typeface="Calibri"/>
               </a:rPr>
-              <a:t> млн/год</a:t>
+              <a:t> млрд ₸</a:t>
             </a:r>
           </a:p>
         </p:txBody>
@@ -29789,7 +29789,7 @@
                 </a:solidFill>
                 <a:latin typeface="Calibri"/>
               </a:rPr>
-              <a:t>выручка ОМУ (75 тыс т × $450/т)</a:t>
+              <a:t>пиковая выручка (~$36 млн) — фин. модель</a:t>
             </a:r>
           </a:p>
         </p:txBody>
@@ -29920,7 +29920,7 @@
                 </a:solidFill>
                 <a:latin typeface="Arial"/>
               </a:rPr>
-              <a:t>≈48%</a:t>
+              <a:t>≈57%</a:t>
             </a:r>
             <a:r>
               <a:rPr sz="1050" b="1">
@@ -29971,7 +29971,7 @@
                 </a:solidFill>
                 <a:latin typeface="Calibri"/>
               </a:rPr>
-              <a:t>валовая маржа ОМУ ($217/т)</a:t>
+              <a:t>валовая маржа на выходе (фин. модель)</a:t>
             </a:r>
           </a:p>
         </p:txBody>
@@ -30191,7 +30191,7 @@
                 </a:solidFill>
                 <a:latin typeface="Calibri"/>
               </a:rPr>
-              <a:t>Ценовое преимущество: ОМУ на ≈ 29% дешевле импортных комплексных удобрений (~$630/т) при эффективности 1:3 (ФАО).</a:t>
+              <a:t>Ценовое преимущество: ОМУ на ≈ 23% дешевле импортных комплексных удобрений (~$630/т) при эффективности 1:3 (ФАО).</a:t>
             </a:r>
           </a:p>
         </p:txBody>
@@ -30385,7 +30385,7 @@
         <p:spPr>
           <a:xfrm>
             <a:off x="508000" y="4572000"/>
-            <a:ext cx="7112000" cy="152400"/>
+            <a:ext cx="8026400" cy="152400"/>
           </a:xfrm>
           <a:prstGeom prst="rect">
             <a:avLst/>
@@ -30410,7 +30410,7 @@
                 </a:solidFill>
                 <a:latin typeface="Calibri"/>
               </a:rPr>
-              <a:t>Расчёты менеджмента на основе проектных данных (≥75 тыс т/год, цена $450/т) и рыночных источников IFA / World Bank / БНС РК.</a:t>
+              <a:t>Фин. модель FEM v11.5 (4,95 МВт · 80 тыс т ОМУ · цена $487/т · 80/20): IRR проекта 31,08%, NPV 30,77 млрд ₸, WACC 12,71%, окупаемость 5,1 г.</a:t>
             </a:r>
           </a:p>
         </p:txBody>
